--- a/Company Research/TIMES24/TIMES24_Company_Fundamentals_Presentation.pptx
+++ b/Company Research/TIMES24/TIMES24_Company_Fundamentals_Presentation.pptx
@@ -18,6 +18,9 @@
     <p:sldId id="265" r:id="rId12"/>
     <p:sldId id="266" r:id="rId13"/>
     <p:sldId id="267" r:id="rId14"/>
+    <p:sldId id="269" r:id="rId15"/>
+    <p:sldId id="270" r:id="rId16"/>
+    <p:sldId id="271" r:id="rId17"/>
   </p:sldIdLst>
   <p:sldSz cx="9144000" cy="6858000" type="screen4x3"/>
   <p:notesSz cx="6858000" cy="9144000"/>
@@ -36048,6 +36051,3306 @@
 </p:sld>
 </file>
 
+<file path=ppt/slides/slide14.xml><?xml version="1.0" encoding="utf-8"?>
+<p:sld xmlns:a="http://schemas.openxmlformats.org/drawingml/2006/main" xmlns:r="http://schemas.openxmlformats.org/officeDocument/2006/relationships" xmlns:p="http://schemas.openxmlformats.org/presentationml/2006/main">
+  <p:cSld>
+    <p:bg>
+      <p:bgPr>
+        <a:solidFill>
+          <a:schemeClr val="bg1"/>
+        </a:solidFill>
+        <a:effectLst/>
+      </p:bgPr>
+    </p:bg>
+    <p:spTree>
+      <p:nvGrpSpPr>
+        <p:cNvPr id="1" name=""/>
+        <p:cNvGrpSpPr/>
+        <p:nvPr/>
+      </p:nvGrpSpPr>
+      <p:grpSpPr>
+        <a:xfrm>
+          <a:off x="0" y="0"/>
+          <a:ext cx="0" cy="0"/>
+          <a:chOff x="0" y="0"/>
+          <a:chExt cx="0" cy="0"/>
+        </a:xfrm>
+      </p:grpSpPr>
+      <p:sp useBgFill="1">
+        <p:nvSpPr>
+          <p:cNvPr id="24" name="Rectangle 23">
+            <a:extLst>
+              <a:ext uri="{FF2B5EF4-FFF2-40B4-BE49-F238E27FC236}">
+                <a16:creationId xmlns:a16="http://schemas.microsoft.com/office/drawing/2014/main" id="{09588DA8-065E-4F6F-8EFD-43104AB2E0CF}"/>
+              </a:ext>
+              <a:ext uri="{C183D7F6-B498-43B3-948B-1728B52AA6E4}">
+                <adec:decorative xmlns:adec="http://schemas.microsoft.com/office/drawing/2017/decorative" val="1"/>
+              </a:ext>
+            </a:extLst>
+          </p:cNvPr>
+          <p:cNvSpPr>
+            <a:spLocks noGrp="1" noRot="1" noChangeAspect="1" noMove="1" noResize="1" noEditPoints="1" noAdjustHandles="1" noChangeArrowheads="1" noChangeShapeType="1" noTextEdit="1"/>
+          </p:cNvSpPr>
+          <p:nvPr>
+            <p:extLst>
+              <p:ext uri="{386F3935-93C4-4BCD-93E2-E3B085C9AB24}">
+                <p16:designElem xmlns:p16="http://schemas.microsoft.com/office/powerpoint/2015/main" val="1"/>
+              </p:ext>
+            </p:extLst>
+          </p:nvPr>
+        </p:nvSpPr>
+        <p:spPr>
+          <a:xfrm>
+            <a:off x="0" y="0"/>
+            <a:ext cx="9144000" cy="6858000"/>
+          </a:xfrm>
+          <a:prstGeom prst="rect">
+            <a:avLst/>
+          </a:prstGeom>
+          <a:ln w="12700" cap="flat" cmpd="sng" algn="ctr">
+            <a:noFill/>
+            <a:prstDash val="solid"/>
+            <a:miter lim="800000"/>
+          </a:ln>
+          <a:effectLst/>
+          <a:extLst>
+            <a:ext uri="{91240B29-F687-4F45-9708-019B960494DF}">
+              <a14:hiddenLine xmlns:a14="http://schemas.microsoft.com/office/drawing/2010/main" w="12700" cap="flat" cmpd="sng" algn="ctr">
+                <a:solidFill>
+                  <a:schemeClr val="accent1">
+                    <a:shade val="50000"/>
+                  </a:schemeClr>
+                </a:solidFill>
+                <a:prstDash val="solid"/>
+                <a:miter lim="800000"/>
+              </a14:hiddenLine>
+            </a:ext>
+          </a:extLst>
+        </p:spPr>
+        <p:style>
+          <a:lnRef idx="2">
+            <a:schemeClr val="accent1">
+              <a:shade val="50000"/>
+            </a:schemeClr>
+          </a:lnRef>
+          <a:fillRef idx="1">
+            <a:schemeClr val="accent1"/>
+          </a:fillRef>
+          <a:effectRef idx="0">
+            <a:schemeClr val="accent1"/>
+          </a:effectRef>
+          <a:fontRef idx="minor">
+            <a:schemeClr val="lt1"/>
+          </a:fontRef>
+        </p:style>
+        <p:txBody>
+          <a:bodyPr rtlCol="0" anchor="ctr"/>
+          <a:lstStyle/>
+          <a:p>
+            <a:pPr algn="ctr"/>
+            <a:endParaRPr lang="en-US"/>
+          </a:p>
+        </p:txBody>
+      </p:sp>
+      <p:sp useBgFill="1">
+        <p:nvSpPr>
+          <p:cNvPr id="26" name="Rectangle 25">
+            <a:extLst>
+              <a:ext uri="{FF2B5EF4-FFF2-40B4-BE49-F238E27FC236}">
+                <a16:creationId xmlns:a16="http://schemas.microsoft.com/office/drawing/2014/main" id="{C4285719-470E-454C-AF62-8323075F1F5B}"/>
+              </a:ext>
+              <a:ext uri="{C183D7F6-B498-43B3-948B-1728B52AA6E4}">
+                <adec:decorative xmlns:adec="http://schemas.microsoft.com/office/drawing/2017/decorative" val="1"/>
+              </a:ext>
+            </a:extLst>
+          </p:cNvPr>
+          <p:cNvSpPr>
+            <a:spLocks noGrp="1" noRot="1" noChangeAspect="1" noMove="1" noResize="1" noEditPoints="1" noAdjustHandles="1" noChangeArrowheads="1" noChangeShapeType="1" noTextEdit="1"/>
+          </p:cNvSpPr>
+          <p:nvPr>
+            <p:extLst>
+              <p:ext uri="{386F3935-93C4-4BCD-93E2-E3B085C9AB24}">
+                <p16:designElem xmlns:p16="http://schemas.microsoft.com/office/powerpoint/2015/main" val="1"/>
+              </p:ext>
+            </p:extLst>
+          </p:nvPr>
+        </p:nvSpPr>
+        <p:spPr>
+          <a:xfrm>
+            <a:off x="0" y="0"/>
+            <a:ext cx="9141714" cy="6858000"/>
+          </a:xfrm>
+          <a:prstGeom prst="rect">
+            <a:avLst/>
+          </a:prstGeom>
+          <a:ln w="12700" cap="flat" cmpd="sng" algn="ctr">
+            <a:noFill/>
+            <a:prstDash val="solid"/>
+            <a:miter lim="800000"/>
+          </a:ln>
+          <a:effectLst/>
+          <a:extLst>
+            <a:ext uri="{91240B29-F687-4F45-9708-019B960494DF}">
+              <a14:hiddenLine xmlns:a14="http://schemas.microsoft.com/office/drawing/2010/main" w="12700" cap="flat" cmpd="sng" algn="ctr">
+                <a:solidFill>
+                  <a:schemeClr val="accent1">
+                    <a:shade val="50000"/>
+                  </a:schemeClr>
+                </a:solidFill>
+                <a:prstDash val="solid"/>
+                <a:miter lim="800000"/>
+              </a14:hiddenLine>
+            </a:ext>
+          </a:extLst>
+        </p:spPr>
+        <p:style>
+          <a:lnRef idx="2">
+            <a:schemeClr val="accent1">
+              <a:shade val="50000"/>
+            </a:schemeClr>
+          </a:lnRef>
+          <a:fillRef idx="1">
+            <a:schemeClr val="accent1"/>
+          </a:fillRef>
+          <a:effectRef idx="0">
+            <a:schemeClr val="accent1"/>
+          </a:effectRef>
+          <a:fontRef idx="minor">
+            <a:schemeClr val="lt1"/>
+          </a:fontRef>
+        </p:style>
+        <p:txBody>
+          <a:bodyPr rtlCol="0" anchor="ctr"/>
+          <a:lstStyle/>
+          <a:p>
+            <a:pPr algn="ctr"/>
+            <a:endParaRPr lang="en-US"/>
+          </a:p>
+        </p:txBody>
+      </p:sp>
+      <p:sp>
+        <p:nvSpPr>
+          <p:cNvPr id="28" name="Rectangle 27">
+            <a:extLst>
+              <a:ext uri="{FF2B5EF4-FFF2-40B4-BE49-F238E27FC236}">
+                <a16:creationId xmlns:a16="http://schemas.microsoft.com/office/drawing/2014/main" id="{CD9FE4EF-C4D8-49A0-B2FF-81D8DB7D8A24}"/>
+              </a:ext>
+              <a:ext uri="{C183D7F6-B498-43B3-948B-1728B52AA6E4}">
+                <adec:decorative xmlns:adec="http://schemas.microsoft.com/office/drawing/2017/decorative" val="1"/>
+              </a:ext>
+            </a:extLst>
+          </p:cNvPr>
+          <p:cNvSpPr>
+            <a:spLocks noGrp="1" noRot="1" noChangeAspect="1" noMove="1" noResize="1" noEditPoints="1" noAdjustHandles="1" noChangeArrowheads="1" noChangeShapeType="1" noTextEdit="1"/>
+          </p:cNvSpPr>
+          <p:nvPr>
+            <p:extLst>
+              <p:ext uri="{386F3935-93C4-4BCD-93E2-E3B085C9AB24}">
+                <p16:designElem xmlns:p16="http://schemas.microsoft.com/office/powerpoint/2015/main" val="1"/>
+              </p:ext>
+            </p:extLst>
+          </p:nvPr>
+        </p:nvSpPr>
+        <p:spPr>
+          <a:xfrm rot="5400000" flipH="1">
+            <a:off x="-1914813" y="1914812"/>
+            <a:ext cx="6858000" cy="3028377"/>
+          </a:xfrm>
+          <a:prstGeom prst="rect">
+            <a:avLst/>
+          </a:prstGeom>
+          <a:gradFill>
+            <a:gsLst>
+              <a:gs pos="8000">
+                <a:srgbClr val="000000"/>
+              </a:gs>
+              <a:gs pos="100000">
+                <a:schemeClr val="accent1">
+                  <a:lumMod val="75000"/>
+                </a:schemeClr>
+              </a:gs>
+            </a:gsLst>
+            <a:lin ang="3000000" scaled="0"/>
+          </a:gradFill>
+          <a:ln>
+            <a:noFill/>
+          </a:ln>
+        </p:spPr>
+        <p:style>
+          <a:lnRef idx="2">
+            <a:schemeClr val="accent1">
+              <a:shade val="50000"/>
+            </a:schemeClr>
+          </a:lnRef>
+          <a:fillRef idx="1">
+            <a:schemeClr val="accent1"/>
+          </a:fillRef>
+          <a:effectRef idx="0">
+            <a:schemeClr val="accent1"/>
+          </a:effectRef>
+          <a:fontRef idx="minor">
+            <a:schemeClr val="lt1"/>
+          </a:fontRef>
+        </p:style>
+        <p:txBody>
+          <a:bodyPr rtlCol="0" anchor="ctr"/>
+          <a:lstStyle/>
+          <a:p>
+            <a:pPr algn="ctr"/>
+            <a:endParaRPr lang="en-US"/>
+          </a:p>
+        </p:txBody>
+      </p:sp>
+      <p:sp>
+        <p:nvSpPr>
+          <p:cNvPr id="30" name="Rectangle 29">
+            <a:extLst>
+              <a:ext uri="{FF2B5EF4-FFF2-40B4-BE49-F238E27FC236}">
+                <a16:creationId xmlns:a16="http://schemas.microsoft.com/office/drawing/2014/main" id="{4300840D-0A0B-4512-BACA-B439D5B9C57C}"/>
+              </a:ext>
+              <a:ext uri="{C183D7F6-B498-43B3-948B-1728B52AA6E4}">
+                <adec:decorative xmlns:adec="http://schemas.microsoft.com/office/drawing/2017/decorative" val="1"/>
+              </a:ext>
+            </a:extLst>
+          </p:cNvPr>
+          <p:cNvSpPr>
+            <a:spLocks noGrp="1" noRot="1" noChangeAspect="1" noMove="1" noResize="1" noEditPoints="1" noAdjustHandles="1" noChangeArrowheads="1" noChangeShapeType="1" noTextEdit="1"/>
+          </p:cNvSpPr>
+          <p:nvPr>
+            <p:extLst>
+              <p:ext uri="{386F3935-93C4-4BCD-93E2-E3B085C9AB24}">
+                <p16:designElem xmlns:p16="http://schemas.microsoft.com/office/powerpoint/2015/main" val="1"/>
+              </p:ext>
+            </p:extLst>
+          </p:nvPr>
+        </p:nvSpPr>
+        <p:spPr>
+          <a:xfrm rot="5400000" flipH="1">
+            <a:off x="-1914814" y="1924949"/>
+            <a:ext cx="6857999" cy="3028379"/>
+          </a:xfrm>
+          <a:prstGeom prst="rect">
+            <a:avLst/>
+          </a:prstGeom>
+          <a:gradFill>
+            <a:gsLst>
+              <a:gs pos="0">
+                <a:srgbClr val="000000">
+                  <a:alpha val="0"/>
+                </a:srgbClr>
+              </a:gs>
+              <a:gs pos="99000">
+                <a:schemeClr val="accent1">
+                  <a:alpha val="46000"/>
+                </a:schemeClr>
+              </a:gs>
+            </a:gsLst>
+            <a:lin ang="1800000" scaled="0"/>
+          </a:gradFill>
+          <a:ln>
+            <a:noFill/>
+          </a:ln>
+        </p:spPr>
+        <p:style>
+          <a:lnRef idx="2">
+            <a:schemeClr val="accent1">
+              <a:shade val="50000"/>
+            </a:schemeClr>
+          </a:lnRef>
+          <a:fillRef idx="1">
+            <a:schemeClr val="accent1"/>
+          </a:fillRef>
+          <a:effectRef idx="0">
+            <a:schemeClr val="accent1"/>
+          </a:effectRef>
+          <a:fontRef idx="minor">
+            <a:schemeClr val="lt1"/>
+          </a:fontRef>
+        </p:style>
+        <p:txBody>
+          <a:bodyPr rtlCol="0" anchor="ctr"/>
+          <a:lstStyle/>
+          <a:p>
+            <a:pPr algn="ctr"/>
+            <a:endParaRPr lang="en-US"/>
+          </a:p>
+        </p:txBody>
+      </p:sp>
+      <p:sp>
+        <p:nvSpPr>
+          <p:cNvPr id="32" name="Rectangle 31">
+            <a:extLst>
+              <a:ext uri="{FF2B5EF4-FFF2-40B4-BE49-F238E27FC236}">
+                <a16:creationId xmlns:a16="http://schemas.microsoft.com/office/drawing/2014/main" id="{D2B78728-A580-49A7-84F9-6EF6F583ADE0}"/>
+              </a:ext>
+              <a:ext uri="{C183D7F6-B498-43B3-948B-1728B52AA6E4}">
+                <adec:decorative xmlns:adec="http://schemas.microsoft.com/office/drawing/2017/decorative" val="1"/>
+              </a:ext>
+            </a:extLst>
+          </p:cNvPr>
+          <p:cNvSpPr>
+            <a:spLocks noGrp="1" noRot="1" noChangeAspect="1" noMove="1" noResize="1" noEditPoints="1" noAdjustHandles="1" noChangeArrowheads="1" noChangeShapeType="1" noTextEdit="1"/>
+          </p:cNvSpPr>
+          <p:nvPr>
+            <p:extLst>
+              <p:ext uri="{386F3935-93C4-4BCD-93E2-E3B085C9AB24}">
+                <p16:designElem xmlns:p16="http://schemas.microsoft.com/office/powerpoint/2015/main" val="1"/>
+              </p:ext>
+            </p:extLst>
+          </p:nvPr>
+        </p:nvSpPr>
+        <p:spPr>
+          <a:xfrm rot="5400000" flipH="1">
+            <a:off x="263195" y="4092815"/>
+            <a:ext cx="2501979" cy="3028381"/>
+          </a:xfrm>
+          <a:prstGeom prst="rect">
+            <a:avLst/>
+          </a:prstGeom>
+          <a:gradFill>
+            <a:gsLst>
+              <a:gs pos="2000">
+                <a:schemeClr val="accent1">
+                  <a:alpha val="29000"/>
+                </a:schemeClr>
+              </a:gs>
+              <a:gs pos="100000">
+                <a:srgbClr val="000000">
+                  <a:alpha val="30000"/>
+                </a:srgbClr>
+              </a:gs>
+            </a:gsLst>
+            <a:lin ang="7800000" scaled="0"/>
+          </a:gradFill>
+          <a:ln>
+            <a:noFill/>
+          </a:ln>
+        </p:spPr>
+        <p:style>
+          <a:lnRef idx="2">
+            <a:schemeClr val="accent1">
+              <a:shade val="50000"/>
+            </a:schemeClr>
+          </a:lnRef>
+          <a:fillRef idx="1">
+            <a:schemeClr val="accent1"/>
+          </a:fillRef>
+          <a:effectRef idx="0">
+            <a:schemeClr val="accent1"/>
+          </a:effectRef>
+          <a:fontRef idx="minor">
+            <a:schemeClr val="lt1"/>
+          </a:fontRef>
+        </p:style>
+        <p:txBody>
+          <a:bodyPr rtlCol="0" anchor="ctr"/>
+          <a:lstStyle/>
+          <a:p>
+            <a:pPr algn="ctr"/>
+            <a:endParaRPr lang="en-US" dirty="0"/>
+          </a:p>
+        </p:txBody>
+      </p:sp>
+      <p:sp>
+        <p:nvSpPr>
+          <p:cNvPr id="34" name="Freeform: Shape 33">
+            <a:extLst>
+              <a:ext uri="{FF2B5EF4-FFF2-40B4-BE49-F238E27FC236}">
+                <a16:creationId xmlns:a16="http://schemas.microsoft.com/office/drawing/2014/main" id="{38FAA1A1-D861-433F-88FA-1E9D6FD31D11}"/>
+              </a:ext>
+              <a:ext uri="{C183D7F6-B498-43B3-948B-1728B52AA6E4}">
+                <adec:decorative xmlns:adec="http://schemas.microsoft.com/office/drawing/2017/decorative" val="1"/>
+              </a:ext>
+            </a:extLst>
+          </p:cNvPr>
+          <p:cNvSpPr>
+            <a:spLocks noGrp="1" noRot="1" noChangeAspect="1" noMove="1" noResize="1" noEditPoints="1" noAdjustHandles="1" noChangeArrowheads="1" noChangeShapeType="1" noTextEdit="1"/>
+          </p:cNvSpPr>
+          <p:nvPr>
+            <p:extLst>
+              <p:ext uri="{386F3935-93C4-4BCD-93E2-E3B085C9AB24}">
+                <p16:designElem xmlns:p16="http://schemas.microsoft.com/office/powerpoint/2015/main" val="1"/>
+              </p:ext>
+            </p:extLst>
+          </p:nvPr>
+        </p:nvSpPr>
+        <p:spPr>
+          <a:xfrm rot="20635413">
+            <a:off x="-376302" y="969718"/>
+            <a:ext cx="2925267" cy="4178958"/>
+          </a:xfrm>
+          <a:custGeom>
+            <a:avLst/>
+            <a:gdLst>
+              <a:gd name="connsiteX0" fmla="*/ 2432225 w 3900357"/>
+              <a:gd name="connsiteY0" fmla="*/ 93939 h 4178958"/>
+              <a:gd name="connsiteX1" fmla="*/ 3900357 w 3900357"/>
+              <a:gd name="connsiteY1" fmla="*/ 2089479 h 4178958"/>
+              <a:gd name="connsiteX2" fmla="*/ 1810878 w 3900357"/>
+              <a:gd name="connsiteY2" fmla="*/ 4178958 h 4178958"/>
+              <a:gd name="connsiteX3" fmla="*/ 78249 w 3900357"/>
+              <a:gd name="connsiteY3" fmla="*/ 3257727 h 4178958"/>
+              <a:gd name="connsiteX4" fmla="*/ 0 w 3900357"/>
+              <a:gd name="connsiteY4" fmla="*/ 3128923 h 4178958"/>
+              <a:gd name="connsiteX5" fmla="*/ 831324 w 3900357"/>
+              <a:gd name="connsiteY5" fmla="*/ 244281 h 4178958"/>
+              <a:gd name="connsiteX6" fmla="*/ 997559 w 3900357"/>
+              <a:gd name="connsiteY6" fmla="*/ 164202 h 4178958"/>
+              <a:gd name="connsiteX7" fmla="*/ 1810878 w 3900357"/>
+              <a:gd name="connsiteY7" fmla="*/ 0 h 4178958"/>
+              <a:gd name="connsiteX8" fmla="*/ 2432225 w 3900357"/>
+              <a:gd name="connsiteY8" fmla="*/ 93939 h 4178958"/>
+            </a:gdLst>
+            <a:ahLst/>
+            <a:cxnLst>
+              <a:cxn ang="0">
+                <a:pos x="connsiteX0" y="connsiteY0"/>
+              </a:cxn>
+              <a:cxn ang="0">
+                <a:pos x="connsiteX1" y="connsiteY1"/>
+              </a:cxn>
+              <a:cxn ang="0">
+                <a:pos x="connsiteX2" y="connsiteY2"/>
+              </a:cxn>
+              <a:cxn ang="0">
+                <a:pos x="connsiteX3" y="connsiteY3"/>
+              </a:cxn>
+              <a:cxn ang="0">
+                <a:pos x="connsiteX4" y="connsiteY4"/>
+              </a:cxn>
+              <a:cxn ang="0">
+                <a:pos x="connsiteX5" y="connsiteY5"/>
+              </a:cxn>
+              <a:cxn ang="0">
+                <a:pos x="connsiteX6" y="connsiteY6"/>
+              </a:cxn>
+              <a:cxn ang="0">
+                <a:pos x="connsiteX7" y="connsiteY7"/>
+              </a:cxn>
+              <a:cxn ang="0">
+                <a:pos x="connsiteX8" y="connsiteY8"/>
+              </a:cxn>
+            </a:cxnLst>
+            <a:rect l="l" t="t" r="r" b="b"/>
+            <a:pathLst>
+              <a:path w="3900357" h="4178958">
+                <a:moveTo>
+                  <a:pt x="2432225" y="93939"/>
+                </a:moveTo>
+                <a:cubicBezTo>
+                  <a:pt x="3282786" y="358491"/>
+                  <a:pt x="3900357" y="1151865"/>
+                  <a:pt x="3900357" y="2089479"/>
+                </a:cubicBezTo>
+                <a:cubicBezTo>
+                  <a:pt x="3900357" y="3243466"/>
+                  <a:pt x="2964865" y="4178958"/>
+                  <a:pt x="1810878" y="4178958"/>
+                </a:cubicBezTo>
+                <a:cubicBezTo>
+                  <a:pt x="1089636" y="4178958"/>
+                  <a:pt x="453744" y="3813531"/>
+                  <a:pt x="78249" y="3257727"/>
+                </a:cubicBezTo>
+                <a:lnTo>
+                  <a:pt x="0" y="3128923"/>
+                </a:lnTo>
+                <a:lnTo>
+                  <a:pt x="831324" y="244281"/>
+                </a:lnTo>
+                <a:lnTo>
+                  <a:pt x="997559" y="164202"/>
+                </a:lnTo>
+                <a:cubicBezTo>
+                  <a:pt x="1247540" y="58468"/>
+                  <a:pt x="1522381" y="0"/>
+                  <a:pt x="1810878" y="0"/>
+                </a:cubicBezTo>
+                <a:cubicBezTo>
+                  <a:pt x="2027251" y="0"/>
+                  <a:pt x="2235942" y="32888"/>
+                  <a:pt x="2432225" y="93939"/>
+                </a:cubicBezTo>
+                <a:close/>
+              </a:path>
+            </a:pathLst>
+          </a:custGeom>
+          <a:gradFill>
+            <a:gsLst>
+              <a:gs pos="29000">
+                <a:srgbClr val="000000">
+                  <a:alpha val="0"/>
+                </a:srgbClr>
+              </a:gs>
+              <a:gs pos="100000">
+                <a:schemeClr val="accent1">
+                  <a:alpha val="43000"/>
+                </a:schemeClr>
+              </a:gs>
+            </a:gsLst>
+            <a:lin ang="1800000" scaled="0"/>
+          </a:gradFill>
+          <a:ln>
+            <a:noFill/>
+          </a:ln>
+        </p:spPr>
+        <p:style>
+          <a:lnRef idx="2">
+            <a:schemeClr val="accent1">
+              <a:shade val="50000"/>
+            </a:schemeClr>
+          </a:lnRef>
+          <a:fillRef idx="1">
+            <a:schemeClr val="accent1"/>
+          </a:fillRef>
+          <a:effectRef idx="0">
+            <a:schemeClr val="accent1"/>
+          </a:effectRef>
+          <a:fontRef idx="minor">
+            <a:schemeClr val="lt1"/>
+          </a:fontRef>
+        </p:style>
+        <p:txBody>
+          <a:bodyPr wrap="square" rtlCol="0" anchor="ctr">
+            <a:noAutofit/>
+          </a:bodyPr>
+          <a:lstStyle/>
+          <a:p>
+            <a:pPr algn="ctr"/>
+            <a:endParaRPr lang="en-US" dirty="0"/>
+          </a:p>
+        </p:txBody>
+      </p:sp>
+      <p:sp>
+        <p:nvSpPr>
+          <p:cNvPr id="36" name="Rectangle 35">
+            <a:extLst>
+              <a:ext uri="{FF2B5EF4-FFF2-40B4-BE49-F238E27FC236}">
+                <a16:creationId xmlns:a16="http://schemas.microsoft.com/office/drawing/2014/main" id="{8D71EDA1-87BF-4D5D-AB79-F346FD19278A}"/>
+              </a:ext>
+              <a:ext uri="{C183D7F6-B498-43B3-948B-1728B52AA6E4}">
+                <adec:decorative xmlns:adec="http://schemas.microsoft.com/office/drawing/2017/decorative" val="1"/>
+              </a:ext>
+            </a:extLst>
+          </p:cNvPr>
+          <p:cNvSpPr>
+            <a:spLocks noGrp="1" noRot="1" noChangeAspect="1" noMove="1" noResize="1" noEditPoints="1" noAdjustHandles="1" noChangeArrowheads="1" noChangeShapeType="1" noTextEdit="1"/>
+          </p:cNvSpPr>
+          <p:nvPr>
+            <p:extLst>
+              <p:ext uri="{386F3935-93C4-4BCD-93E2-E3B085C9AB24}">
+                <p16:designElem xmlns:p16="http://schemas.microsoft.com/office/powerpoint/2015/main" val="1"/>
+              </p:ext>
+            </p:extLst>
+          </p:nvPr>
+        </p:nvSpPr>
+        <p:spPr>
+          <a:xfrm rot="5400000" flipH="1">
+            <a:off x="-1914820" y="1904672"/>
+            <a:ext cx="6858003" cy="3028376"/>
+          </a:xfrm>
+          <a:prstGeom prst="rect">
+            <a:avLst/>
+          </a:prstGeom>
+          <a:gradFill>
+            <a:gsLst>
+              <a:gs pos="0">
+                <a:srgbClr val="000000">
+                  <a:alpha val="0"/>
+                </a:srgbClr>
+              </a:gs>
+              <a:gs pos="99000">
+                <a:schemeClr val="accent1">
+                  <a:lumMod val="60000"/>
+                  <a:lumOff val="40000"/>
+                  <a:alpha val="11000"/>
+                </a:schemeClr>
+              </a:gs>
+            </a:gsLst>
+            <a:lin ang="7200000" scaled="0"/>
+          </a:gradFill>
+          <a:ln>
+            <a:noFill/>
+          </a:ln>
+        </p:spPr>
+        <p:style>
+          <a:lnRef idx="2">
+            <a:schemeClr val="accent1">
+              <a:shade val="50000"/>
+            </a:schemeClr>
+          </a:lnRef>
+          <a:fillRef idx="1">
+            <a:schemeClr val="accent1"/>
+          </a:fillRef>
+          <a:effectRef idx="0">
+            <a:schemeClr val="accent1"/>
+          </a:effectRef>
+          <a:fontRef idx="minor">
+            <a:schemeClr val="lt1"/>
+          </a:fontRef>
+        </p:style>
+        <p:txBody>
+          <a:bodyPr rtlCol="0" anchor="ctr"/>
+          <a:lstStyle/>
+          <a:p>
+            <a:pPr algn="ctr"/>
+            <a:endParaRPr lang="en-US"/>
+          </a:p>
+        </p:txBody>
+      </p:sp>
+      <p:sp>
+        <p:nvSpPr>
+          <p:cNvPr id="2" name="Title 1">
+            <a:extLst>
+              <a:ext uri="{FF2B5EF4-FFF2-40B4-BE49-F238E27FC236}">
+                <a16:creationId xmlns:a16="http://schemas.microsoft.com/office/drawing/2014/main" id="{B5281E2D-DDAB-CE00-ED8C-F9889027CC55}"/>
+              </a:ext>
+            </a:extLst>
+          </p:cNvPr>
+          <p:cNvSpPr>
+            <a:spLocks noGrp="1"/>
+          </p:cNvSpPr>
+          <p:nvPr>
+            <p:ph type="title"/>
+          </p:nvPr>
+        </p:nvSpPr>
+        <p:spPr>
+          <a:xfrm>
+            <a:off x="350041" y="586855"/>
+            <a:ext cx="2401025" cy="3387497"/>
+          </a:xfrm>
+        </p:spPr>
+        <p:txBody>
+          <a:bodyPr anchor="b">
+            <a:normAutofit/>
+          </a:bodyPr>
+          <a:lstStyle/>
+          <a:p>
+            <a:pPr algn="r"/>
+            <a:r>
+              <a:rPr lang="en-US" sz="2200">
+                <a:solidFill>
+                  <a:srgbClr val="FFFFFF"/>
+                </a:solidFill>
+              </a:rPr>
+              <a:t>BI View Recommendation</a:t>
+            </a:r>
+            <a:endParaRPr lang="en-MY" sz="2200">
+              <a:solidFill>
+                <a:srgbClr val="FFFFFF"/>
+              </a:solidFill>
+            </a:endParaRPr>
+          </a:p>
+        </p:txBody>
+      </p:sp>
+      <p:sp>
+        <p:nvSpPr>
+          <p:cNvPr id="19" name="Rectangle 16">
+            <a:extLst>
+              <a:ext uri="{FF2B5EF4-FFF2-40B4-BE49-F238E27FC236}">
+                <a16:creationId xmlns:a16="http://schemas.microsoft.com/office/drawing/2014/main" id="{7DD014B9-3517-C7C5-85FD-52F28A34499D}"/>
+              </a:ext>
+            </a:extLst>
+          </p:cNvPr>
+          <p:cNvSpPr>
+            <a:spLocks noGrp="1" noChangeArrowheads="1"/>
+          </p:cNvSpPr>
+          <p:nvPr>
+            <p:ph idx="1"/>
+          </p:nvPr>
+        </p:nvSpPr>
+        <p:spPr bwMode="auto">
+          <a:xfrm>
+            <a:off x="3607694" y="649480"/>
+            <a:ext cx="4916510" cy="5546047"/>
+          </a:xfrm>
+          <a:prstGeom prst="rect">
+            <a:avLst/>
+          </a:prstGeom>
+          <a:extLst>
+            <a:ext uri="{909E8E84-426E-40DD-AFC4-6F175D3DCCD1}">
+              <a14:hiddenFill xmlns:a14="http://schemas.microsoft.com/office/drawing/2010/main">
+                <a:solidFill>
+                  <a:schemeClr val="accent1"/>
+                </a:solidFill>
+              </a14:hiddenFill>
+            </a:ext>
+            <a:ext uri="{91240B29-F687-4F45-9708-019B960494DF}">
+              <a14:hiddenLine xmlns:a14="http://schemas.microsoft.com/office/drawing/2010/main" w="9525">
+                <a:solidFill>
+                  <a:schemeClr val="tx1"/>
+                </a:solidFill>
+                <a:miter lim="800000"/>
+                <a:headEnd/>
+                <a:tailEnd/>
+              </a14:hiddenLine>
+            </a:ext>
+            <a:ext uri="{AF507438-7753-43E0-B8FC-AC1667EBCBE1}">
+              <a14:hiddenEffects xmlns:a14="http://schemas.microsoft.com/office/drawing/2010/main">
+                <a:effectLst>
+                  <a:outerShdw dist="35921" dir="2700000" algn="ctr" rotWithShape="0">
+                    <a:schemeClr val="bg2"/>
+                  </a:outerShdw>
+                </a:effectLst>
+              </a14:hiddenEffects>
+            </a:ext>
+          </a:extLst>
+        </p:spPr>
+        <p:txBody>
+          <a:bodyPr vert="horz" lIns="91440" tIns="45720" rIns="91440" bIns="45720" numCol="1" anchor="ctr" anchorCtr="0" compatLnSpc="1">
+            <a:prstTxWarp prst="textNoShape">
+              <a:avLst/>
+            </a:prstTxWarp>
+            <a:normAutofit/>
+          </a:bodyPr>
+          <a:lstStyle/>
+          <a:p>
+            <a:pPr marL="0" marR="0" lvl="0" indent="0" defTabSz="914400" rtl="0" eaLnBrk="0" fontAlgn="base" latinLnBrk="0" hangingPunct="0">
+              <a:spcBef>
+                <a:spcPct val="0"/>
+              </a:spcBef>
+              <a:spcAft>
+                <a:spcPts val="600"/>
+              </a:spcAft>
+              <a:buClrTx/>
+              <a:buSzTx/>
+              <a:buFontTx/>
+              <a:buNone/>
+              <a:tabLst/>
+            </a:pPr>
+            <a:r>
+              <a:rPr kumimoji="0" lang="en-US" altLang="en-US" sz="1700" b="1" i="0" u="none" strike="noStrike" cap="none" normalizeH="0" baseline="0">
+                <a:ln>
+                  <a:noFill/>
+                </a:ln>
+                <a:effectLst/>
+                <a:latin typeface="Arial" panose="020B0604020202020204" pitchFamily="34" charset="0"/>
+              </a:rPr>
+              <a:t>📊 1. Operational Dashboard</a:t>
+            </a:r>
+          </a:p>
+          <a:p>
+            <a:pPr marL="0" marR="0" lvl="0" indent="0" defTabSz="914400" rtl="0" eaLnBrk="0" fontAlgn="base" latinLnBrk="0" hangingPunct="0">
+              <a:spcBef>
+                <a:spcPct val="0"/>
+              </a:spcBef>
+              <a:spcAft>
+                <a:spcPts val="600"/>
+              </a:spcAft>
+              <a:buClrTx/>
+              <a:buSzTx/>
+              <a:buFontTx/>
+              <a:buNone/>
+              <a:tabLst/>
+            </a:pPr>
+            <a:r>
+              <a:rPr lang="en-US" altLang="en-US" sz="1700" b="1">
+                <a:latin typeface="Arial" panose="020B0604020202020204" pitchFamily="34" charset="0"/>
+              </a:rPr>
+              <a:t>Audience</a:t>
+            </a:r>
+            <a:r>
+              <a:rPr kumimoji="0" lang="en-US" altLang="en-US" sz="1700" b="0" i="0" u="none" strike="noStrike" cap="none" normalizeH="0" baseline="0">
+                <a:ln>
+                  <a:noFill/>
+                </a:ln>
+                <a:effectLst/>
+                <a:latin typeface="Arial" panose="020B0604020202020204" pitchFamily="34" charset="0"/>
+              </a:rPr>
+              <a:t>: Frontline staff, operations teams</a:t>
+            </a:r>
+          </a:p>
+          <a:p>
+            <a:pPr marL="0" marR="0" lvl="0" indent="0" defTabSz="914400" rtl="0" eaLnBrk="0" fontAlgn="base" latinLnBrk="0" hangingPunct="0">
+              <a:spcBef>
+                <a:spcPct val="0"/>
+              </a:spcBef>
+              <a:spcAft>
+                <a:spcPts val="600"/>
+              </a:spcAft>
+              <a:buClrTx/>
+              <a:buSzTx/>
+              <a:buFontTx/>
+              <a:buNone/>
+              <a:tabLst/>
+            </a:pPr>
+            <a:r>
+              <a:rPr kumimoji="0" lang="en-US" altLang="en-US" sz="1700" b="1" i="0" u="none" strike="noStrike" cap="none" normalizeH="0" baseline="0">
+                <a:ln>
+                  <a:noFill/>
+                </a:ln>
+                <a:effectLst/>
+                <a:latin typeface="Arial" panose="020B0604020202020204" pitchFamily="34" charset="0"/>
+              </a:rPr>
+              <a:t>Focus</a:t>
+            </a:r>
+            <a:r>
+              <a:rPr kumimoji="0" lang="en-US" altLang="en-US" sz="1700" b="0" i="0" u="none" strike="noStrike" cap="none" normalizeH="0" baseline="0">
+                <a:ln>
+                  <a:noFill/>
+                </a:ln>
+                <a:effectLst/>
+                <a:latin typeface="Arial" panose="020B0604020202020204" pitchFamily="34" charset="0"/>
+              </a:rPr>
+              <a:t>: Real-time monitoring and immediate action</a:t>
+            </a:r>
+          </a:p>
+          <a:p>
+            <a:pPr marL="0" marR="0" lvl="0" indent="0" defTabSz="914400" rtl="0" eaLnBrk="0" fontAlgn="base" latinLnBrk="0" hangingPunct="0">
+              <a:spcBef>
+                <a:spcPct val="0"/>
+              </a:spcBef>
+              <a:spcAft>
+                <a:spcPts val="600"/>
+              </a:spcAft>
+              <a:buClrTx/>
+              <a:buSzTx/>
+              <a:buFontTx/>
+              <a:buNone/>
+              <a:tabLst/>
+            </a:pPr>
+            <a:r>
+              <a:rPr kumimoji="0" lang="en-US" altLang="en-US" sz="1700" b="1" i="0" u="none" strike="noStrike" cap="none" normalizeH="0" baseline="0">
+                <a:ln>
+                  <a:noFill/>
+                </a:ln>
+                <a:effectLst/>
+                <a:latin typeface="Arial" panose="020B0604020202020204" pitchFamily="34" charset="0"/>
+              </a:rPr>
+              <a:t>Insights</a:t>
+            </a:r>
+            <a:r>
+              <a:rPr kumimoji="0" lang="en-US" altLang="en-US" sz="1700" b="0" i="0" u="none" strike="noStrike" cap="none" normalizeH="0" baseline="0">
+                <a:ln>
+                  <a:noFill/>
+                </a:ln>
+                <a:effectLst/>
+                <a:latin typeface="Arial" panose="020B0604020202020204" pitchFamily="34" charset="0"/>
+              </a:rPr>
+              <a:t>:</a:t>
+            </a:r>
+          </a:p>
+          <a:p>
+            <a:pPr marL="400050" lvl="1" indent="0" defTabSz="914400" eaLnBrk="0" fontAlgn="base" hangingPunct="0">
+              <a:spcBef>
+                <a:spcPct val="0"/>
+              </a:spcBef>
+              <a:spcAft>
+                <a:spcPts val="600"/>
+              </a:spcAft>
+              <a:buFontTx/>
+              <a:buChar char="•"/>
+            </a:pPr>
+            <a:r>
+              <a:rPr kumimoji="0" lang="en-US" altLang="en-US" sz="1700" b="1" i="0" u="none" strike="noStrike" cap="none" normalizeH="0" baseline="0">
+                <a:ln>
+                  <a:noFill/>
+                </a:ln>
+                <a:effectLst/>
+                <a:latin typeface="Arial" panose="020B0604020202020204" pitchFamily="34" charset="0"/>
+              </a:rPr>
+              <a:t>Live system status</a:t>
+            </a:r>
+            <a:r>
+              <a:rPr kumimoji="0" lang="en-US" altLang="en-US" sz="1700" b="0" i="0" u="none" strike="noStrike" cap="none" normalizeH="0" baseline="0">
+                <a:ln>
+                  <a:noFill/>
+                </a:ln>
+                <a:effectLst/>
+                <a:latin typeface="Arial" panose="020B0604020202020204" pitchFamily="34" charset="0"/>
+              </a:rPr>
+              <a:t> (e.g., parking occupancy, ETL job success/failure)</a:t>
+            </a:r>
+          </a:p>
+          <a:p>
+            <a:pPr marL="400050" lvl="1" indent="0" defTabSz="914400" eaLnBrk="0" fontAlgn="base" hangingPunct="0">
+              <a:spcBef>
+                <a:spcPct val="0"/>
+              </a:spcBef>
+              <a:spcAft>
+                <a:spcPts val="600"/>
+              </a:spcAft>
+              <a:buFontTx/>
+              <a:buChar char="•"/>
+            </a:pPr>
+            <a:r>
+              <a:rPr kumimoji="0" lang="en-US" altLang="en-US" sz="1700" b="1" i="0" u="none" strike="noStrike" cap="none" normalizeH="0" baseline="0">
+                <a:ln>
+                  <a:noFill/>
+                </a:ln>
+                <a:effectLst/>
+                <a:latin typeface="Arial" panose="020B0604020202020204" pitchFamily="34" charset="0"/>
+              </a:rPr>
+              <a:t>Daily performance metrics</a:t>
+            </a:r>
+            <a:r>
+              <a:rPr kumimoji="0" lang="en-US" altLang="en-US" sz="1700" b="0" i="0" u="none" strike="noStrike" cap="none" normalizeH="0" baseline="0">
+                <a:ln>
+                  <a:noFill/>
+                </a:ln>
+                <a:effectLst/>
+                <a:latin typeface="Arial" panose="020B0604020202020204" pitchFamily="34" charset="0"/>
+              </a:rPr>
+              <a:t> (e.g., number of transactions, data ingestion volume)</a:t>
+            </a:r>
+          </a:p>
+          <a:p>
+            <a:pPr marL="400050" lvl="1" indent="0" defTabSz="914400" eaLnBrk="0" fontAlgn="base" hangingPunct="0">
+              <a:spcBef>
+                <a:spcPct val="0"/>
+              </a:spcBef>
+              <a:spcAft>
+                <a:spcPts val="600"/>
+              </a:spcAft>
+              <a:buFontTx/>
+              <a:buChar char="•"/>
+            </a:pPr>
+            <a:r>
+              <a:rPr kumimoji="0" lang="en-US" altLang="en-US" sz="1700" b="1" i="0" u="none" strike="noStrike" cap="none" normalizeH="0" baseline="0">
+                <a:ln>
+                  <a:noFill/>
+                </a:ln>
+                <a:effectLst/>
+                <a:latin typeface="Arial" panose="020B0604020202020204" pitchFamily="34" charset="0"/>
+              </a:rPr>
+              <a:t>Alerts and exceptions</a:t>
+            </a:r>
+            <a:r>
+              <a:rPr kumimoji="0" lang="en-US" altLang="en-US" sz="1700" b="0" i="0" u="none" strike="noStrike" cap="none" normalizeH="0" baseline="0">
+                <a:ln>
+                  <a:noFill/>
+                </a:ln>
+                <a:effectLst/>
+                <a:latin typeface="Arial" panose="020B0604020202020204" pitchFamily="34" charset="0"/>
+              </a:rPr>
+              <a:t> (e.g., failed data loads, access violations)</a:t>
+            </a:r>
+          </a:p>
+          <a:p>
+            <a:pPr marL="400050" lvl="1" indent="0" defTabSz="914400" eaLnBrk="0" fontAlgn="base" hangingPunct="0">
+              <a:spcBef>
+                <a:spcPct val="0"/>
+              </a:spcBef>
+              <a:spcAft>
+                <a:spcPts val="600"/>
+              </a:spcAft>
+              <a:buFontTx/>
+              <a:buChar char="•"/>
+            </a:pPr>
+            <a:r>
+              <a:rPr kumimoji="0" lang="en-US" altLang="en-US" sz="1700" b="1" i="0" u="none" strike="noStrike" cap="none" normalizeH="0" baseline="0">
+                <a:ln>
+                  <a:noFill/>
+                </a:ln>
+                <a:effectLst/>
+                <a:latin typeface="Arial" panose="020B0604020202020204" pitchFamily="34" charset="0"/>
+              </a:rPr>
+              <a:t>User activity logs</a:t>
+            </a:r>
+            <a:r>
+              <a:rPr kumimoji="0" lang="en-US" altLang="en-US" sz="1700" b="0" i="0" u="none" strike="noStrike" cap="none" normalizeH="0" baseline="0">
+                <a:ln>
+                  <a:noFill/>
+                </a:ln>
+                <a:effectLst/>
+                <a:latin typeface="Arial" panose="020B0604020202020204" pitchFamily="34" charset="0"/>
+              </a:rPr>
+              <a:t> (e.g., login frequency, dashboard usage)</a:t>
+            </a:r>
+          </a:p>
+          <a:p>
+            <a:pPr marL="400050" lvl="1" indent="0" defTabSz="914400" eaLnBrk="0" fontAlgn="base" hangingPunct="0">
+              <a:spcBef>
+                <a:spcPct val="0"/>
+              </a:spcBef>
+              <a:spcAft>
+                <a:spcPts val="600"/>
+              </a:spcAft>
+              <a:buFontTx/>
+              <a:buChar char="•"/>
+            </a:pPr>
+            <a:r>
+              <a:rPr kumimoji="0" lang="en-US" altLang="en-US" sz="1700" b="1" i="0" u="none" strike="noStrike" cap="none" normalizeH="0" baseline="0">
+                <a:ln>
+                  <a:noFill/>
+                </a:ln>
+                <a:effectLst/>
+                <a:latin typeface="Arial" panose="020B0604020202020204" pitchFamily="34" charset="0"/>
+              </a:rPr>
+              <a:t>Queue lengths or processing times</a:t>
+            </a:r>
+            <a:r>
+              <a:rPr kumimoji="0" lang="en-US" altLang="en-US" sz="1700" b="0" i="0" u="none" strike="noStrike" cap="none" normalizeH="0" baseline="0">
+                <a:ln>
+                  <a:noFill/>
+                </a:ln>
+                <a:effectLst/>
+                <a:latin typeface="Arial" panose="020B0604020202020204" pitchFamily="34" charset="0"/>
+              </a:rPr>
+              <a:t> (e.g., Talend job execution time)</a:t>
+            </a:r>
+          </a:p>
+          <a:p>
+            <a:pPr marL="0" marR="0" lvl="0" indent="0" defTabSz="914400" rtl="0" eaLnBrk="0" fontAlgn="base" latinLnBrk="0" hangingPunct="0">
+              <a:spcBef>
+                <a:spcPct val="0"/>
+              </a:spcBef>
+              <a:spcAft>
+                <a:spcPts val="600"/>
+              </a:spcAft>
+              <a:buClrTx/>
+              <a:buSzTx/>
+              <a:buFontTx/>
+              <a:buNone/>
+              <a:tabLst/>
+            </a:pPr>
+            <a:r>
+              <a:rPr kumimoji="0" lang="en-US" altLang="en-US" sz="1700" b="0" i="0" u="none" strike="noStrike" cap="none" normalizeH="0" baseline="0">
+                <a:ln>
+                  <a:noFill/>
+                </a:ln>
+                <a:effectLst/>
+                <a:latin typeface="Arial" panose="020B0604020202020204" pitchFamily="34" charset="0"/>
+              </a:rPr>
+              <a:t>✅ </a:t>
+            </a:r>
+            <a:r>
+              <a:rPr kumimoji="0" lang="en-US" altLang="en-US" sz="1700" b="0" i="1" u="none" strike="noStrike" cap="none" normalizeH="0" baseline="0">
+                <a:ln>
+                  <a:noFill/>
+                </a:ln>
+                <a:effectLst/>
+                <a:latin typeface="Arial" panose="020B0604020202020204" pitchFamily="34" charset="0"/>
+              </a:rPr>
+              <a:t>Used for quick decisions and troubleshooting.</a:t>
+            </a:r>
+            <a:endParaRPr kumimoji="0" lang="en-US" altLang="en-US" sz="1700" b="0" i="0" u="none" strike="noStrike" cap="none" normalizeH="0" baseline="0">
+              <a:ln>
+                <a:noFill/>
+              </a:ln>
+              <a:effectLst/>
+              <a:latin typeface="Arial" panose="020B0604020202020204" pitchFamily="34" charset="0"/>
+            </a:endParaRPr>
+          </a:p>
+        </p:txBody>
+      </p:sp>
+    </p:spTree>
+    <p:extLst>
+      <p:ext uri="{BB962C8B-B14F-4D97-AF65-F5344CB8AC3E}">
+        <p14:creationId xmlns:p14="http://schemas.microsoft.com/office/powerpoint/2010/main" val="2624207281"/>
+      </p:ext>
+    </p:extLst>
+  </p:cSld>
+  <p:clrMapOvr>
+    <a:masterClrMapping/>
+  </p:clrMapOvr>
+</p:sld>
+</file>
+
+<file path=ppt/slides/slide15.xml><?xml version="1.0" encoding="utf-8"?>
+<p:sld xmlns:a="http://schemas.openxmlformats.org/drawingml/2006/main" xmlns:r="http://schemas.openxmlformats.org/officeDocument/2006/relationships" xmlns:p="http://schemas.openxmlformats.org/presentationml/2006/main">
+  <p:cSld>
+    <p:bg>
+      <p:bgPr>
+        <a:solidFill>
+          <a:schemeClr val="bg1"/>
+        </a:solidFill>
+        <a:effectLst/>
+      </p:bgPr>
+    </p:bg>
+    <p:spTree>
+      <p:nvGrpSpPr>
+        <p:cNvPr id="1" name="">
+          <a:extLst>
+            <a:ext uri="{FF2B5EF4-FFF2-40B4-BE49-F238E27FC236}">
+              <a16:creationId xmlns:a16="http://schemas.microsoft.com/office/drawing/2014/main" id="{30370B8B-0663-48E6-D355-0AF5EE8F81F3}"/>
+            </a:ext>
+          </a:extLst>
+        </p:cNvPr>
+        <p:cNvGrpSpPr/>
+        <p:nvPr/>
+      </p:nvGrpSpPr>
+      <p:grpSpPr>
+        <a:xfrm>
+          <a:off x="0" y="0"/>
+          <a:ext cx="0" cy="0"/>
+          <a:chOff x="0" y="0"/>
+          <a:chExt cx="0" cy="0"/>
+        </a:xfrm>
+      </p:grpSpPr>
+      <p:sp useBgFill="1">
+        <p:nvSpPr>
+          <p:cNvPr id="9" name="Rectangle 8">
+            <a:extLst>
+              <a:ext uri="{FF2B5EF4-FFF2-40B4-BE49-F238E27FC236}">
+                <a16:creationId xmlns:a16="http://schemas.microsoft.com/office/drawing/2014/main" id="{09588DA8-065E-4F6F-8EFD-43104AB2E0CF}"/>
+              </a:ext>
+              <a:ext uri="{C183D7F6-B498-43B3-948B-1728B52AA6E4}">
+                <adec:decorative xmlns:adec="http://schemas.microsoft.com/office/drawing/2017/decorative" val="1"/>
+              </a:ext>
+            </a:extLst>
+          </p:cNvPr>
+          <p:cNvSpPr>
+            <a:spLocks noGrp="1" noRot="1" noChangeAspect="1" noMove="1" noResize="1" noEditPoints="1" noAdjustHandles="1" noChangeArrowheads="1" noChangeShapeType="1" noTextEdit="1"/>
+          </p:cNvSpPr>
+          <p:nvPr>
+            <p:extLst>
+              <p:ext uri="{386F3935-93C4-4BCD-93E2-E3B085C9AB24}">
+                <p16:designElem xmlns:p16="http://schemas.microsoft.com/office/powerpoint/2015/main" val="1"/>
+              </p:ext>
+            </p:extLst>
+          </p:nvPr>
+        </p:nvSpPr>
+        <p:spPr>
+          <a:xfrm>
+            <a:off x="0" y="0"/>
+            <a:ext cx="9144000" cy="6858000"/>
+          </a:xfrm>
+          <a:prstGeom prst="rect">
+            <a:avLst/>
+          </a:prstGeom>
+          <a:ln w="12700" cap="flat" cmpd="sng" algn="ctr">
+            <a:noFill/>
+            <a:prstDash val="solid"/>
+            <a:miter lim="800000"/>
+          </a:ln>
+          <a:effectLst/>
+          <a:extLst>
+            <a:ext uri="{91240B29-F687-4F45-9708-019B960494DF}">
+              <a14:hiddenLine xmlns:a14="http://schemas.microsoft.com/office/drawing/2010/main" w="12700" cap="flat" cmpd="sng" algn="ctr">
+                <a:solidFill>
+                  <a:schemeClr val="accent1">
+                    <a:shade val="50000"/>
+                  </a:schemeClr>
+                </a:solidFill>
+                <a:prstDash val="solid"/>
+                <a:miter lim="800000"/>
+              </a14:hiddenLine>
+            </a:ext>
+          </a:extLst>
+        </p:spPr>
+        <p:style>
+          <a:lnRef idx="2">
+            <a:schemeClr val="accent1">
+              <a:shade val="50000"/>
+            </a:schemeClr>
+          </a:lnRef>
+          <a:fillRef idx="1">
+            <a:schemeClr val="accent1"/>
+          </a:fillRef>
+          <a:effectRef idx="0">
+            <a:schemeClr val="accent1"/>
+          </a:effectRef>
+          <a:fontRef idx="minor">
+            <a:schemeClr val="lt1"/>
+          </a:fontRef>
+        </p:style>
+        <p:txBody>
+          <a:bodyPr rtlCol="0" anchor="ctr"/>
+          <a:lstStyle/>
+          <a:p>
+            <a:pPr algn="ctr"/>
+            <a:endParaRPr lang="en-US"/>
+          </a:p>
+        </p:txBody>
+      </p:sp>
+      <p:sp useBgFill="1">
+        <p:nvSpPr>
+          <p:cNvPr id="11" name="Rectangle 10">
+            <a:extLst>
+              <a:ext uri="{FF2B5EF4-FFF2-40B4-BE49-F238E27FC236}">
+                <a16:creationId xmlns:a16="http://schemas.microsoft.com/office/drawing/2014/main" id="{C4285719-470E-454C-AF62-8323075F1F5B}"/>
+              </a:ext>
+              <a:ext uri="{C183D7F6-B498-43B3-948B-1728B52AA6E4}">
+                <adec:decorative xmlns:adec="http://schemas.microsoft.com/office/drawing/2017/decorative" val="1"/>
+              </a:ext>
+            </a:extLst>
+          </p:cNvPr>
+          <p:cNvSpPr>
+            <a:spLocks noGrp="1" noRot="1" noChangeAspect="1" noMove="1" noResize="1" noEditPoints="1" noAdjustHandles="1" noChangeArrowheads="1" noChangeShapeType="1" noTextEdit="1"/>
+          </p:cNvSpPr>
+          <p:nvPr>
+            <p:extLst>
+              <p:ext uri="{386F3935-93C4-4BCD-93E2-E3B085C9AB24}">
+                <p16:designElem xmlns:p16="http://schemas.microsoft.com/office/powerpoint/2015/main" val="1"/>
+              </p:ext>
+            </p:extLst>
+          </p:nvPr>
+        </p:nvSpPr>
+        <p:spPr>
+          <a:xfrm>
+            <a:off x="0" y="0"/>
+            <a:ext cx="9141714" cy="6858000"/>
+          </a:xfrm>
+          <a:prstGeom prst="rect">
+            <a:avLst/>
+          </a:prstGeom>
+          <a:ln w="12700" cap="flat" cmpd="sng" algn="ctr">
+            <a:noFill/>
+            <a:prstDash val="solid"/>
+            <a:miter lim="800000"/>
+          </a:ln>
+          <a:effectLst/>
+          <a:extLst>
+            <a:ext uri="{91240B29-F687-4F45-9708-019B960494DF}">
+              <a14:hiddenLine xmlns:a14="http://schemas.microsoft.com/office/drawing/2010/main" w="12700" cap="flat" cmpd="sng" algn="ctr">
+                <a:solidFill>
+                  <a:schemeClr val="accent1">
+                    <a:shade val="50000"/>
+                  </a:schemeClr>
+                </a:solidFill>
+                <a:prstDash val="solid"/>
+                <a:miter lim="800000"/>
+              </a14:hiddenLine>
+            </a:ext>
+          </a:extLst>
+        </p:spPr>
+        <p:style>
+          <a:lnRef idx="2">
+            <a:schemeClr val="accent1">
+              <a:shade val="50000"/>
+            </a:schemeClr>
+          </a:lnRef>
+          <a:fillRef idx="1">
+            <a:schemeClr val="accent1"/>
+          </a:fillRef>
+          <a:effectRef idx="0">
+            <a:schemeClr val="accent1"/>
+          </a:effectRef>
+          <a:fontRef idx="minor">
+            <a:schemeClr val="lt1"/>
+          </a:fontRef>
+        </p:style>
+        <p:txBody>
+          <a:bodyPr rtlCol="0" anchor="ctr"/>
+          <a:lstStyle/>
+          <a:p>
+            <a:pPr algn="ctr"/>
+            <a:endParaRPr lang="en-US"/>
+          </a:p>
+        </p:txBody>
+      </p:sp>
+      <p:sp>
+        <p:nvSpPr>
+          <p:cNvPr id="13" name="Rectangle 12">
+            <a:extLst>
+              <a:ext uri="{FF2B5EF4-FFF2-40B4-BE49-F238E27FC236}">
+                <a16:creationId xmlns:a16="http://schemas.microsoft.com/office/drawing/2014/main" id="{CD9FE4EF-C4D8-49A0-B2FF-81D8DB7D8A24}"/>
+              </a:ext>
+              <a:ext uri="{C183D7F6-B498-43B3-948B-1728B52AA6E4}">
+                <adec:decorative xmlns:adec="http://schemas.microsoft.com/office/drawing/2017/decorative" val="1"/>
+              </a:ext>
+            </a:extLst>
+          </p:cNvPr>
+          <p:cNvSpPr>
+            <a:spLocks noGrp="1" noRot="1" noChangeAspect="1" noMove="1" noResize="1" noEditPoints="1" noAdjustHandles="1" noChangeArrowheads="1" noChangeShapeType="1" noTextEdit="1"/>
+          </p:cNvSpPr>
+          <p:nvPr>
+            <p:extLst>
+              <p:ext uri="{386F3935-93C4-4BCD-93E2-E3B085C9AB24}">
+                <p16:designElem xmlns:p16="http://schemas.microsoft.com/office/powerpoint/2015/main" val="1"/>
+              </p:ext>
+            </p:extLst>
+          </p:nvPr>
+        </p:nvSpPr>
+        <p:spPr>
+          <a:xfrm rot="5400000" flipH="1">
+            <a:off x="-1914813" y="1914812"/>
+            <a:ext cx="6858000" cy="3028377"/>
+          </a:xfrm>
+          <a:prstGeom prst="rect">
+            <a:avLst/>
+          </a:prstGeom>
+          <a:gradFill>
+            <a:gsLst>
+              <a:gs pos="8000">
+                <a:srgbClr val="000000"/>
+              </a:gs>
+              <a:gs pos="100000">
+                <a:schemeClr val="accent1">
+                  <a:lumMod val="75000"/>
+                </a:schemeClr>
+              </a:gs>
+            </a:gsLst>
+            <a:lin ang="3000000" scaled="0"/>
+          </a:gradFill>
+          <a:ln>
+            <a:noFill/>
+          </a:ln>
+        </p:spPr>
+        <p:style>
+          <a:lnRef idx="2">
+            <a:schemeClr val="accent1">
+              <a:shade val="50000"/>
+            </a:schemeClr>
+          </a:lnRef>
+          <a:fillRef idx="1">
+            <a:schemeClr val="accent1"/>
+          </a:fillRef>
+          <a:effectRef idx="0">
+            <a:schemeClr val="accent1"/>
+          </a:effectRef>
+          <a:fontRef idx="minor">
+            <a:schemeClr val="lt1"/>
+          </a:fontRef>
+        </p:style>
+        <p:txBody>
+          <a:bodyPr rtlCol="0" anchor="ctr"/>
+          <a:lstStyle/>
+          <a:p>
+            <a:pPr algn="ctr"/>
+            <a:endParaRPr lang="en-US"/>
+          </a:p>
+        </p:txBody>
+      </p:sp>
+      <p:sp>
+        <p:nvSpPr>
+          <p:cNvPr id="15" name="Rectangle 14">
+            <a:extLst>
+              <a:ext uri="{FF2B5EF4-FFF2-40B4-BE49-F238E27FC236}">
+                <a16:creationId xmlns:a16="http://schemas.microsoft.com/office/drawing/2014/main" id="{4300840D-0A0B-4512-BACA-B439D5B9C57C}"/>
+              </a:ext>
+              <a:ext uri="{C183D7F6-B498-43B3-948B-1728B52AA6E4}">
+                <adec:decorative xmlns:adec="http://schemas.microsoft.com/office/drawing/2017/decorative" val="1"/>
+              </a:ext>
+            </a:extLst>
+          </p:cNvPr>
+          <p:cNvSpPr>
+            <a:spLocks noGrp="1" noRot="1" noChangeAspect="1" noMove="1" noResize="1" noEditPoints="1" noAdjustHandles="1" noChangeArrowheads="1" noChangeShapeType="1" noTextEdit="1"/>
+          </p:cNvSpPr>
+          <p:nvPr>
+            <p:extLst>
+              <p:ext uri="{386F3935-93C4-4BCD-93E2-E3B085C9AB24}">
+                <p16:designElem xmlns:p16="http://schemas.microsoft.com/office/powerpoint/2015/main" val="1"/>
+              </p:ext>
+            </p:extLst>
+          </p:nvPr>
+        </p:nvSpPr>
+        <p:spPr>
+          <a:xfrm rot="5400000" flipH="1">
+            <a:off x="-1914814" y="1924949"/>
+            <a:ext cx="6857999" cy="3028379"/>
+          </a:xfrm>
+          <a:prstGeom prst="rect">
+            <a:avLst/>
+          </a:prstGeom>
+          <a:gradFill>
+            <a:gsLst>
+              <a:gs pos="0">
+                <a:srgbClr val="000000">
+                  <a:alpha val="0"/>
+                </a:srgbClr>
+              </a:gs>
+              <a:gs pos="99000">
+                <a:schemeClr val="accent1">
+                  <a:alpha val="46000"/>
+                </a:schemeClr>
+              </a:gs>
+            </a:gsLst>
+            <a:lin ang="1800000" scaled="0"/>
+          </a:gradFill>
+          <a:ln>
+            <a:noFill/>
+          </a:ln>
+        </p:spPr>
+        <p:style>
+          <a:lnRef idx="2">
+            <a:schemeClr val="accent1">
+              <a:shade val="50000"/>
+            </a:schemeClr>
+          </a:lnRef>
+          <a:fillRef idx="1">
+            <a:schemeClr val="accent1"/>
+          </a:fillRef>
+          <a:effectRef idx="0">
+            <a:schemeClr val="accent1"/>
+          </a:effectRef>
+          <a:fontRef idx="minor">
+            <a:schemeClr val="lt1"/>
+          </a:fontRef>
+        </p:style>
+        <p:txBody>
+          <a:bodyPr rtlCol="0" anchor="ctr"/>
+          <a:lstStyle/>
+          <a:p>
+            <a:pPr algn="ctr"/>
+            <a:endParaRPr lang="en-US"/>
+          </a:p>
+        </p:txBody>
+      </p:sp>
+      <p:sp>
+        <p:nvSpPr>
+          <p:cNvPr id="17" name="Rectangle 16">
+            <a:extLst>
+              <a:ext uri="{FF2B5EF4-FFF2-40B4-BE49-F238E27FC236}">
+                <a16:creationId xmlns:a16="http://schemas.microsoft.com/office/drawing/2014/main" id="{D2B78728-A580-49A7-84F9-6EF6F583ADE0}"/>
+              </a:ext>
+              <a:ext uri="{C183D7F6-B498-43B3-948B-1728B52AA6E4}">
+                <adec:decorative xmlns:adec="http://schemas.microsoft.com/office/drawing/2017/decorative" val="1"/>
+              </a:ext>
+            </a:extLst>
+          </p:cNvPr>
+          <p:cNvSpPr>
+            <a:spLocks noGrp="1" noRot="1" noChangeAspect="1" noMove="1" noResize="1" noEditPoints="1" noAdjustHandles="1" noChangeArrowheads="1" noChangeShapeType="1" noTextEdit="1"/>
+          </p:cNvSpPr>
+          <p:nvPr>
+            <p:extLst>
+              <p:ext uri="{386F3935-93C4-4BCD-93E2-E3B085C9AB24}">
+                <p16:designElem xmlns:p16="http://schemas.microsoft.com/office/powerpoint/2015/main" val="1"/>
+              </p:ext>
+            </p:extLst>
+          </p:nvPr>
+        </p:nvSpPr>
+        <p:spPr>
+          <a:xfrm rot="5400000" flipH="1">
+            <a:off x="263195" y="4092815"/>
+            <a:ext cx="2501979" cy="3028381"/>
+          </a:xfrm>
+          <a:prstGeom prst="rect">
+            <a:avLst/>
+          </a:prstGeom>
+          <a:gradFill>
+            <a:gsLst>
+              <a:gs pos="2000">
+                <a:schemeClr val="accent1">
+                  <a:alpha val="29000"/>
+                </a:schemeClr>
+              </a:gs>
+              <a:gs pos="100000">
+                <a:srgbClr val="000000">
+                  <a:alpha val="30000"/>
+                </a:srgbClr>
+              </a:gs>
+            </a:gsLst>
+            <a:lin ang="7800000" scaled="0"/>
+          </a:gradFill>
+          <a:ln>
+            <a:noFill/>
+          </a:ln>
+        </p:spPr>
+        <p:style>
+          <a:lnRef idx="2">
+            <a:schemeClr val="accent1">
+              <a:shade val="50000"/>
+            </a:schemeClr>
+          </a:lnRef>
+          <a:fillRef idx="1">
+            <a:schemeClr val="accent1"/>
+          </a:fillRef>
+          <a:effectRef idx="0">
+            <a:schemeClr val="accent1"/>
+          </a:effectRef>
+          <a:fontRef idx="minor">
+            <a:schemeClr val="lt1"/>
+          </a:fontRef>
+        </p:style>
+        <p:txBody>
+          <a:bodyPr rtlCol="0" anchor="ctr"/>
+          <a:lstStyle/>
+          <a:p>
+            <a:pPr algn="ctr"/>
+            <a:endParaRPr lang="en-US" dirty="0"/>
+          </a:p>
+        </p:txBody>
+      </p:sp>
+      <p:sp>
+        <p:nvSpPr>
+          <p:cNvPr id="6" name="Freeform: Shape 5">
+            <a:extLst>
+              <a:ext uri="{FF2B5EF4-FFF2-40B4-BE49-F238E27FC236}">
+                <a16:creationId xmlns:a16="http://schemas.microsoft.com/office/drawing/2014/main" id="{38FAA1A1-D861-433F-88FA-1E9D6FD31D11}"/>
+              </a:ext>
+              <a:ext uri="{C183D7F6-B498-43B3-948B-1728B52AA6E4}">
+                <adec:decorative xmlns:adec="http://schemas.microsoft.com/office/drawing/2017/decorative" val="1"/>
+              </a:ext>
+            </a:extLst>
+          </p:cNvPr>
+          <p:cNvSpPr>
+            <a:spLocks noGrp="1" noRot="1" noChangeAspect="1" noMove="1" noResize="1" noEditPoints="1" noAdjustHandles="1" noChangeArrowheads="1" noChangeShapeType="1" noTextEdit="1"/>
+          </p:cNvSpPr>
+          <p:nvPr>
+            <p:extLst>
+              <p:ext uri="{386F3935-93C4-4BCD-93E2-E3B085C9AB24}">
+                <p16:designElem xmlns:p16="http://schemas.microsoft.com/office/powerpoint/2015/main" val="1"/>
+              </p:ext>
+            </p:extLst>
+          </p:nvPr>
+        </p:nvSpPr>
+        <p:spPr>
+          <a:xfrm rot="20635413">
+            <a:off x="-376302" y="969718"/>
+            <a:ext cx="2925267" cy="4178958"/>
+          </a:xfrm>
+          <a:custGeom>
+            <a:avLst/>
+            <a:gdLst>
+              <a:gd name="connsiteX0" fmla="*/ 2432225 w 3900357"/>
+              <a:gd name="connsiteY0" fmla="*/ 93939 h 4178958"/>
+              <a:gd name="connsiteX1" fmla="*/ 3900357 w 3900357"/>
+              <a:gd name="connsiteY1" fmla="*/ 2089479 h 4178958"/>
+              <a:gd name="connsiteX2" fmla="*/ 1810878 w 3900357"/>
+              <a:gd name="connsiteY2" fmla="*/ 4178958 h 4178958"/>
+              <a:gd name="connsiteX3" fmla="*/ 78249 w 3900357"/>
+              <a:gd name="connsiteY3" fmla="*/ 3257727 h 4178958"/>
+              <a:gd name="connsiteX4" fmla="*/ 0 w 3900357"/>
+              <a:gd name="connsiteY4" fmla="*/ 3128923 h 4178958"/>
+              <a:gd name="connsiteX5" fmla="*/ 831324 w 3900357"/>
+              <a:gd name="connsiteY5" fmla="*/ 244281 h 4178958"/>
+              <a:gd name="connsiteX6" fmla="*/ 997559 w 3900357"/>
+              <a:gd name="connsiteY6" fmla="*/ 164202 h 4178958"/>
+              <a:gd name="connsiteX7" fmla="*/ 1810878 w 3900357"/>
+              <a:gd name="connsiteY7" fmla="*/ 0 h 4178958"/>
+              <a:gd name="connsiteX8" fmla="*/ 2432225 w 3900357"/>
+              <a:gd name="connsiteY8" fmla="*/ 93939 h 4178958"/>
+            </a:gdLst>
+            <a:ahLst/>
+            <a:cxnLst>
+              <a:cxn ang="0">
+                <a:pos x="connsiteX0" y="connsiteY0"/>
+              </a:cxn>
+              <a:cxn ang="0">
+                <a:pos x="connsiteX1" y="connsiteY1"/>
+              </a:cxn>
+              <a:cxn ang="0">
+                <a:pos x="connsiteX2" y="connsiteY2"/>
+              </a:cxn>
+              <a:cxn ang="0">
+                <a:pos x="connsiteX3" y="connsiteY3"/>
+              </a:cxn>
+              <a:cxn ang="0">
+                <a:pos x="connsiteX4" y="connsiteY4"/>
+              </a:cxn>
+              <a:cxn ang="0">
+                <a:pos x="connsiteX5" y="connsiteY5"/>
+              </a:cxn>
+              <a:cxn ang="0">
+                <a:pos x="connsiteX6" y="connsiteY6"/>
+              </a:cxn>
+              <a:cxn ang="0">
+                <a:pos x="connsiteX7" y="connsiteY7"/>
+              </a:cxn>
+              <a:cxn ang="0">
+                <a:pos x="connsiteX8" y="connsiteY8"/>
+              </a:cxn>
+            </a:cxnLst>
+            <a:rect l="l" t="t" r="r" b="b"/>
+            <a:pathLst>
+              <a:path w="3900357" h="4178958">
+                <a:moveTo>
+                  <a:pt x="2432225" y="93939"/>
+                </a:moveTo>
+                <a:cubicBezTo>
+                  <a:pt x="3282786" y="358491"/>
+                  <a:pt x="3900357" y="1151865"/>
+                  <a:pt x="3900357" y="2089479"/>
+                </a:cubicBezTo>
+                <a:cubicBezTo>
+                  <a:pt x="3900357" y="3243466"/>
+                  <a:pt x="2964865" y="4178958"/>
+                  <a:pt x="1810878" y="4178958"/>
+                </a:cubicBezTo>
+                <a:cubicBezTo>
+                  <a:pt x="1089636" y="4178958"/>
+                  <a:pt x="453744" y="3813531"/>
+                  <a:pt x="78249" y="3257727"/>
+                </a:cubicBezTo>
+                <a:lnTo>
+                  <a:pt x="0" y="3128923"/>
+                </a:lnTo>
+                <a:lnTo>
+                  <a:pt x="831324" y="244281"/>
+                </a:lnTo>
+                <a:lnTo>
+                  <a:pt x="997559" y="164202"/>
+                </a:lnTo>
+                <a:cubicBezTo>
+                  <a:pt x="1247540" y="58468"/>
+                  <a:pt x="1522381" y="0"/>
+                  <a:pt x="1810878" y="0"/>
+                </a:cubicBezTo>
+                <a:cubicBezTo>
+                  <a:pt x="2027251" y="0"/>
+                  <a:pt x="2235942" y="32888"/>
+                  <a:pt x="2432225" y="93939"/>
+                </a:cubicBezTo>
+                <a:close/>
+              </a:path>
+            </a:pathLst>
+          </a:custGeom>
+          <a:gradFill>
+            <a:gsLst>
+              <a:gs pos="29000">
+                <a:srgbClr val="000000">
+                  <a:alpha val="0"/>
+                </a:srgbClr>
+              </a:gs>
+              <a:gs pos="100000">
+                <a:schemeClr val="accent1">
+                  <a:alpha val="43000"/>
+                </a:schemeClr>
+              </a:gs>
+            </a:gsLst>
+            <a:lin ang="1800000" scaled="0"/>
+          </a:gradFill>
+          <a:ln>
+            <a:noFill/>
+          </a:ln>
+        </p:spPr>
+        <p:style>
+          <a:lnRef idx="2">
+            <a:schemeClr val="accent1">
+              <a:shade val="50000"/>
+            </a:schemeClr>
+          </a:lnRef>
+          <a:fillRef idx="1">
+            <a:schemeClr val="accent1"/>
+          </a:fillRef>
+          <a:effectRef idx="0">
+            <a:schemeClr val="accent1"/>
+          </a:effectRef>
+          <a:fontRef idx="minor">
+            <a:schemeClr val="lt1"/>
+          </a:fontRef>
+        </p:style>
+        <p:txBody>
+          <a:bodyPr wrap="square" rtlCol="0" anchor="ctr">
+            <a:noAutofit/>
+          </a:bodyPr>
+          <a:lstStyle/>
+          <a:p>
+            <a:pPr algn="ctr"/>
+            <a:endParaRPr lang="en-US" dirty="0"/>
+          </a:p>
+        </p:txBody>
+      </p:sp>
+      <p:sp>
+        <p:nvSpPr>
+          <p:cNvPr id="21" name="Rectangle 20">
+            <a:extLst>
+              <a:ext uri="{FF2B5EF4-FFF2-40B4-BE49-F238E27FC236}">
+                <a16:creationId xmlns:a16="http://schemas.microsoft.com/office/drawing/2014/main" id="{8D71EDA1-87BF-4D5D-AB79-F346FD19278A}"/>
+              </a:ext>
+              <a:ext uri="{C183D7F6-B498-43B3-948B-1728B52AA6E4}">
+                <adec:decorative xmlns:adec="http://schemas.microsoft.com/office/drawing/2017/decorative" val="1"/>
+              </a:ext>
+            </a:extLst>
+          </p:cNvPr>
+          <p:cNvSpPr>
+            <a:spLocks noGrp="1" noRot="1" noChangeAspect="1" noMove="1" noResize="1" noEditPoints="1" noAdjustHandles="1" noChangeArrowheads="1" noChangeShapeType="1" noTextEdit="1"/>
+          </p:cNvSpPr>
+          <p:nvPr>
+            <p:extLst>
+              <p:ext uri="{386F3935-93C4-4BCD-93E2-E3B085C9AB24}">
+                <p16:designElem xmlns:p16="http://schemas.microsoft.com/office/powerpoint/2015/main" val="1"/>
+              </p:ext>
+            </p:extLst>
+          </p:nvPr>
+        </p:nvSpPr>
+        <p:spPr>
+          <a:xfrm rot="5400000" flipH="1">
+            <a:off x="-1914820" y="1904672"/>
+            <a:ext cx="6858003" cy="3028376"/>
+          </a:xfrm>
+          <a:prstGeom prst="rect">
+            <a:avLst/>
+          </a:prstGeom>
+          <a:gradFill>
+            <a:gsLst>
+              <a:gs pos="0">
+                <a:srgbClr val="000000">
+                  <a:alpha val="0"/>
+                </a:srgbClr>
+              </a:gs>
+              <a:gs pos="99000">
+                <a:schemeClr val="accent1">
+                  <a:lumMod val="60000"/>
+                  <a:lumOff val="40000"/>
+                  <a:alpha val="11000"/>
+                </a:schemeClr>
+              </a:gs>
+            </a:gsLst>
+            <a:lin ang="7200000" scaled="0"/>
+          </a:gradFill>
+          <a:ln>
+            <a:noFill/>
+          </a:ln>
+        </p:spPr>
+        <p:style>
+          <a:lnRef idx="2">
+            <a:schemeClr val="accent1">
+              <a:shade val="50000"/>
+            </a:schemeClr>
+          </a:lnRef>
+          <a:fillRef idx="1">
+            <a:schemeClr val="accent1"/>
+          </a:fillRef>
+          <a:effectRef idx="0">
+            <a:schemeClr val="accent1"/>
+          </a:effectRef>
+          <a:fontRef idx="minor">
+            <a:schemeClr val="lt1"/>
+          </a:fontRef>
+        </p:style>
+        <p:txBody>
+          <a:bodyPr rtlCol="0" anchor="ctr"/>
+          <a:lstStyle/>
+          <a:p>
+            <a:pPr algn="ctr"/>
+            <a:endParaRPr lang="en-US"/>
+          </a:p>
+        </p:txBody>
+      </p:sp>
+      <p:sp>
+        <p:nvSpPr>
+          <p:cNvPr id="2" name="Title 1">
+            <a:extLst>
+              <a:ext uri="{FF2B5EF4-FFF2-40B4-BE49-F238E27FC236}">
+                <a16:creationId xmlns:a16="http://schemas.microsoft.com/office/drawing/2014/main" id="{AD885A18-C9D0-8894-10D9-9D86C29F98CB}"/>
+              </a:ext>
+            </a:extLst>
+          </p:cNvPr>
+          <p:cNvSpPr>
+            <a:spLocks noGrp="1"/>
+          </p:cNvSpPr>
+          <p:nvPr>
+            <p:ph type="title"/>
+          </p:nvPr>
+        </p:nvSpPr>
+        <p:spPr>
+          <a:xfrm>
+            <a:off x="350041" y="586855"/>
+            <a:ext cx="2401025" cy="3387497"/>
+          </a:xfrm>
+        </p:spPr>
+        <p:txBody>
+          <a:bodyPr anchor="b">
+            <a:normAutofit/>
+          </a:bodyPr>
+          <a:lstStyle/>
+          <a:p>
+            <a:pPr algn="r"/>
+            <a:r>
+              <a:rPr lang="en-US" sz="2200">
+                <a:solidFill>
+                  <a:srgbClr val="FFFFFF"/>
+                </a:solidFill>
+              </a:rPr>
+              <a:t>BI View Recommendation</a:t>
+            </a:r>
+            <a:endParaRPr lang="en-MY" sz="2200">
+              <a:solidFill>
+                <a:srgbClr val="FFFFFF"/>
+              </a:solidFill>
+            </a:endParaRPr>
+          </a:p>
+        </p:txBody>
+      </p:sp>
+      <p:sp>
+        <p:nvSpPr>
+          <p:cNvPr id="4" name="Rectangle 2">
+            <a:extLst>
+              <a:ext uri="{FF2B5EF4-FFF2-40B4-BE49-F238E27FC236}">
+                <a16:creationId xmlns:a16="http://schemas.microsoft.com/office/drawing/2014/main" id="{025930AC-FD40-AEA4-ED67-C713E29FD5B2}"/>
+              </a:ext>
+            </a:extLst>
+          </p:cNvPr>
+          <p:cNvSpPr>
+            <a:spLocks noGrp="1" noChangeArrowheads="1"/>
+          </p:cNvSpPr>
+          <p:nvPr>
+            <p:ph idx="1"/>
+          </p:nvPr>
+        </p:nvSpPr>
+        <p:spPr bwMode="auto">
+          <a:xfrm>
+            <a:off x="3607694" y="649480"/>
+            <a:ext cx="4916510" cy="5546047"/>
+          </a:xfrm>
+          <a:prstGeom prst="rect">
+            <a:avLst/>
+          </a:prstGeom>
+          <a:extLst>
+            <a:ext uri="{909E8E84-426E-40DD-AFC4-6F175D3DCCD1}">
+              <a14:hiddenFill xmlns:a14="http://schemas.microsoft.com/office/drawing/2010/main">
+                <a:solidFill>
+                  <a:schemeClr val="accent1"/>
+                </a:solidFill>
+              </a14:hiddenFill>
+            </a:ext>
+            <a:ext uri="{91240B29-F687-4F45-9708-019B960494DF}">
+              <a14:hiddenLine xmlns:a14="http://schemas.microsoft.com/office/drawing/2010/main" w="9525">
+                <a:solidFill>
+                  <a:schemeClr val="tx1"/>
+                </a:solidFill>
+                <a:miter lim="800000"/>
+                <a:headEnd/>
+                <a:tailEnd/>
+              </a14:hiddenLine>
+            </a:ext>
+            <a:ext uri="{AF507438-7753-43E0-B8FC-AC1667EBCBE1}">
+              <a14:hiddenEffects xmlns:a14="http://schemas.microsoft.com/office/drawing/2010/main">
+                <a:effectLst>
+                  <a:outerShdw dist="35921" dir="2700000" algn="ctr" rotWithShape="0">
+                    <a:schemeClr val="bg2"/>
+                  </a:outerShdw>
+                </a:effectLst>
+              </a14:hiddenEffects>
+            </a:ext>
+          </a:extLst>
+        </p:spPr>
+        <p:txBody>
+          <a:bodyPr vert="horz" lIns="91440" tIns="45720" rIns="91440" bIns="45720" numCol="1" anchor="ctr" anchorCtr="0" compatLnSpc="1">
+            <a:prstTxWarp prst="textNoShape">
+              <a:avLst/>
+            </a:prstTxWarp>
+            <a:normAutofit/>
+          </a:bodyPr>
+          <a:lstStyle/>
+          <a:p>
+            <a:pPr marL="0" marR="0" lvl="0" indent="0" defTabSz="914400" rtl="0" eaLnBrk="0" fontAlgn="base" latinLnBrk="0" hangingPunct="0">
+              <a:spcBef>
+                <a:spcPct val="0"/>
+              </a:spcBef>
+              <a:spcAft>
+                <a:spcPts val="600"/>
+              </a:spcAft>
+              <a:buClrTx/>
+              <a:buSzTx/>
+              <a:buFontTx/>
+              <a:buNone/>
+              <a:tabLst/>
+            </a:pPr>
+            <a:r>
+              <a:rPr kumimoji="0" lang="en-US" altLang="en-US" sz="1700" b="1" i="0" u="none" strike="noStrike" cap="none" normalizeH="0" baseline="0">
+                <a:ln>
+                  <a:noFill/>
+                </a:ln>
+                <a:effectLst/>
+                <a:latin typeface="Arial" panose="020B0604020202020204" pitchFamily="34" charset="0"/>
+              </a:rPr>
+              <a:t>📈 2. Tactical Dashboard</a:t>
+            </a:r>
+          </a:p>
+          <a:p>
+            <a:pPr marL="0" marR="0" lvl="0" indent="0" defTabSz="914400" rtl="0" eaLnBrk="0" fontAlgn="base" latinLnBrk="0" hangingPunct="0">
+              <a:spcBef>
+                <a:spcPct val="0"/>
+              </a:spcBef>
+              <a:spcAft>
+                <a:spcPts val="600"/>
+              </a:spcAft>
+              <a:buClrTx/>
+              <a:buSzTx/>
+              <a:buFontTx/>
+              <a:buNone/>
+              <a:tabLst/>
+            </a:pPr>
+            <a:r>
+              <a:rPr lang="en-US" altLang="en-US" sz="1700" b="1">
+                <a:latin typeface="Arial" panose="020B0604020202020204" pitchFamily="34" charset="0"/>
+              </a:rPr>
+              <a:t>Audience</a:t>
+            </a:r>
+            <a:r>
+              <a:rPr kumimoji="0" lang="en-US" altLang="en-US" sz="1700" b="0" i="0" u="none" strike="noStrike" cap="none" normalizeH="0" baseline="0">
+                <a:ln>
+                  <a:noFill/>
+                </a:ln>
+                <a:effectLst/>
+                <a:latin typeface="Arial" panose="020B0604020202020204" pitchFamily="34" charset="0"/>
+              </a:rPr>
+              <a:t>: Mid-level managers, analysts</a:t>
+            </a:r>
+          </a:p>
+          <a:p>
+            <a:pPr marL="0" marR="0" lvl="0" indent="0" defTabSz="914400" rtl="0" eaLnBrk="0" fontAlgn="base" latinLnBrk="0" hangingPunct="0">
+              <a:spcBef>
+                <a:spcPct val="0"/>
+              </a:spcBef>
+              <a:spcAft>
+                <a:spcPts val="600"/>
+              </a:spcAft>
+              <a:buClrTx/>
+              <a:buSzTx/>
+              <a:buFontTx/>
+              <a:buNone/>
+              <a:tabLst/>
+            </a:pPr>
+            <a:r>
+              <a:rPr kumimoji="0" lang="en-US" altLang="en-US" sz="1700" b="1" i="0" u="none" strike="noStrike" cap="none" normalizeH="0" baseline="0">
+                <a:ln>
+                  <a:noFill/>
+                </a:ln>
+                <a:effectLst/>
+                <a:latin typeface="Arial" panose="020B0604020202020204" pitchFamily="34" charset="0"/>
+              </a:rPr>
+              <a:t>Focus</a:t>
+            </a:r>
+            <a:r>
+              <a:rPr kumimoji="0" lang="en-US" altLang="en-US" sz="1700" b="0" i="0" u="none" strike="noStrike" cap="none" normalizeH="0" baseline="0">
+                <a:ln>
+                  <a:noFill/>
+                </a:ln>
+                <a:effectLst/>
+                <a:latin typeface="Arial" panose="020B0604020202020204" pitchFamily="34" charset="0"/>
+              </a:rPr>
+              <a:t>: Weekly/monthly performance and optimization</a:t>
+            </a:r>
+          </a:p>
+          <a:p>
+            <a:pPr marL="0" marR="0" lvl="0" indent="0" defTabSz="914400" rtl="0" eaLnBrk="0" fontAlgn="base" latinLnBrk="0" hangingPunct="0">
+              <a:spcBef>
+                <a:spcPct val="0"/>
+              </a:spcBef>
+              <a:spcAft>
+                <a:spcPts val="600"/>
+              </a:spcAft>
+              <a:buClrTx/>
+              <a:buSzTx/>
+              <a:buFontTx/>
+              <a:buNone/>
+              <a:tabLst/>
+            </a:pPr>
+            <a:r>
+              <a:rPr kumimoji="0" lang="en-US" altLang="en-US" sz="1700" b="1" i="0" u="none" strike="noStrike" cap="none" normalizeH="0" baseline="0">
+                <a:ln>
+                  <a:noFill/>
+                </a:ln>
+                <a:effectLst/>
+                <a:latin typeface="Arial" panose="020B0604020202020204" pitchFamily="34" charset="0"/>
+              </a:rPr>
+              <a:t>Insights</a:t>
+            </a:r>
+            <a:r>
+              <a:rPr kumimoji="0" lang="en-US" altLang="en-US" sz="1700" b="0" i="0" u="none" strike="noStrike" cap="none" normalizeH="0" baseline="0">
+                <a:ln>
+                  <a:noFill/>
+                </a:ln>
+                <a:effectLst/>
+                <a:latin typeface="Arial" panose="020B0604020202020204" pitchFamily="34" charset="0"/>
+              </a:rPr>
+              <a:t>:</a:t>
+            </a:r>
+          </a:p>
+          <a:p>
+            <a:pPr marL="400050" lvl="1" indent="0" defTabSz="914400" eaLnBrk="0" fontAlgn="base" hangingPunct="0">
+              <a:spcBef>
+                <a:spcPct val="0"/>
+              </a:spcBef>
+              <a:spcAft>
+                <a:spcPts val="600"/>
+              </a:spcAft>
+              <a:buFontTx/>
+              <a:buChar char="•"/>
+            </a:pPr>
+            <a:r>
+              <a:rPr kumimoji="0" lang="en-US" altLang="en-US" sz="1700" b="1" i="0" u="none" strike="noStrike" cap="none" normalizeH="0" baseline="0">
+                <a:ln>
+                  <a:noFill/>
+                </a:ln>
+                <a:effectLst/>
+                <a:latin typeface="Arial" panose="020B0604020202020204" pitchFamily="34" charset="0"/>
+              </a:rPr>
+              <a:t>ETL pipeline efficiency trends</a:t>
+            </a:r>
+            <a:r>
+              <a:rPr kumimoji="0" lang="en-US" altLang="en-US" sz="1700" b="0" i="0" u="none" strike="noStrike" cap="none" normalizeH="0" baseline="0">
+                <a:ln>
+                  <a:noFill/>
+                </a:ln>
+                <a:effectLst/>
+                <a:latin typeface="Arial" panose="020B0604020202020204" pitchFamily="34" charset="0"/>
+              </a:rPr>
+              <a:t> (e.g., average processing time, error rates)</a:t>
+            </a:r>
+          </a:p>
+          <a:p>
+            <a:pPr marL="400050" lvl="1" indent="0" defTabSz="914400" eaLnBrk="0" fontAlgn="base" hangingPunct="0">
+              <a:spcBef>
+                <a:spcPct val="0"/>
+              </a:spcBef>
+              <a:spcAft>
+                <a:spcPts val="600"/>
+              </a:spcAft>
+              <a:buFontTx/>
+              <a:buChar char="•"/>
+            </a:pPr>
+            <a:r>
+              <a:rPr kumimoji="0" lang="en-US" altLang="en-US" sz="1700" b="1" i="0" u="none" strike="noStrike" cap="none" normalizeH="0" baseline="0">
+                <a:ln>
+                  <a:noFill/>
+                </a:ln>
+                <a:effectLst/>
+                <a:latin typeface="Arial" panose="020B0604020202020204" pitchFamily="34" charset="0"/>
+              </a:rPr>
+              <a:t>Data quality metrics</a:t>
+            </a:r>
+            <a:r>
+              <a:rPr kumimoji="0" lang="en-US" altLang="en-US" sz="1700" b="0" i="0" u="none" strike="noStrike" cap="none" normalizeH="0" baseline="0">
+                <a:ln>
+                  <a:noFill/>
+                </a:ln>
+                <a:effectLst/>
+                <a:latin typeface="Arial" panose="020B0604020202020204" pitchFamily="34" charset="0"/>
+              </a:rPr>
+              <a:t> (e.g., completeness, consistency scores)</a:t>
+            </a:r>
+          </a:p>
+          <a:p>
+            <a:pPr marL="400050" lvl="1" indent="0" defTabSz="914400" eaLnBrk="0" fontAlgn="base" hangingPunct="0">
+              <a:spcBef>
+                <a:spcPct val="0"/>
+              </a:spcBef>
+              <a:spcAft>
+                <a:spcPts val="600"/>
+              </a:spcAft>
+              <a:buFontTx/>
+              <a:buChar char="•"/>
+            </a:pPr>
+            <a:r>
+              <a:rPr kumimoji="0" lang="en-US" altLang="en-US" sz="1700" b="1" i="0" u="none" strike="noStrike" cap="none" normalizeH="0" baseline="0">
+                <a:ln>
+                  <a:noFill/>
+                </a:ln>
+                <a:effectLst/>
+                <a:latin typeface="Arial" panose="020B0604020202020204" pitchFamily="34" charset="0"/>
+              </a:rPr>
+              <a:t>Access control audits</a:t>
+            </a:r>
+            <a:r>
+              <a:rPr kumimoji="0" lang="en-US" altLang="en-US" sz="1700" b="0" i="0" u="none" strike="noStrike" cap="none" normalizeH="0" baseline="0">
+                <a:ln>
+                  <a:noFill/>
+                </a:ln>
+                <a:effectLst/>
+                <a:latin typeface="Arial" panose="020B0604020202020204" pitchFamily="34" charset="0"/>
+              </a:rPr>
+              <a:t> (e.g., RBAC compliance, permission changes)</a:t>
+            </a:r>
+          </a:p>
+          <a:p>
+            <a:pPr marL="400050" lvl="1" indent="0" defTabSz="914400" eaLnBrk="0" fontAlgn="base" hangingPunct="0">
+              <a:spcBef>
+                <a:spcPct val="0"/>
+              </a:spcBef>
+              <a:spcAft>
+                <a:spcPts val="600"/>
+              </a:spcAft>
+              <a:buFontTx/>
+              <a:buChar char="•"/>
+            </a:pPr>
+            <a:r>
+              <a:rPr kumimoji="0" lang="en-US" altLang="en-US" sz="1700" b="1" i="0" u="none" strike="noStrike" cap="none" normalizeH="0" baseline="0">
+                <a:ln>
+                  <a:noFill/>
+                </a:ln>
+                <a:effectLst/>
+                <a:latin typeface="Arial" panose="020B0604020202020204" pitchFamily="34" charset="0"/>
+              </a:rPr>
+              <a:t>Usage patterns</a:t>
+            </a:r>
+            <a:r>
+              <a:rPr kumimoji="0" lang="en-US" altLang="en-US" sz="1700" b="0" i="0" u="none" strike="noStrike" cap="none" normalizeH="0" baseline="0">
+                <a:ln>
+                  <a:noFill/>
+                </a:ln>
+                <a:effectLst/>
+                <a:latin typeface="Arial" panose="020B0604020202020204" pitchFamily="34" charset="0"/>
+              </a:rPr>
+              <a:t> (e.g., dashboard views by department)</a:t>
+            </a:r>
+          </a:p>
+          <a:p>
+            <a:pPr marL="400050" lvl="1" indent="0" defTabSz="914400" eaLnBrk="0" fontAlgn="base" hangingPunct="0">
+              <a:spcBef>
+                <a:spcPct val="0"/>
+              </a:spcBef>
+              <a:spcAft>
+                <a:spcPts val="600"/>
+              </a:spcAft>
+              <a:buFontTx/>
+              <a:buChar char="•"/>
+            </a:pPr>
+            <a:r>
+              <a:rPr kumimoji="0" lang="en-US" altLang="en-US" sz="1700" b="1" i="0" u="none" strike="noStrike" cap="none" normalizeH="0" baseline="0">
+                <a:ln>
+                  <a:noFill/>
+                </a:ln>
+                <a:effectLst/>
+                <a:latin typeface="Arial" panose="020B0604020202020204" pitchFamily="34" charset="0"/>
+              </a:rPr>
+              <a:t>Cost analysis</a:t>
+            </a:r>
+            <a:r>
+              <a:rPr kumimoji="0" lang="en-US" altLang="en-US" sz="1700" b="0" i="0" u="none" strike="noStrike" cap="none" normalizeH="0" baseline="0">
+                <a:ln>
+                  <a:noFill/>
+                </a:ln>
+                <a:effectLst/>
+                <a:latin typeface="Arial" panose="020B0604020202020204" pitchFamily="34" charset="0"/>
+              </a:rPr>
+              <a:t> (e.g., cloud resource usage, storage costs)</a:t>
+            </a:r>
+          </a:p>
+          <a:p>
+            <a:pPr marL="0" marR="0" lvl="0" indent="0" defTabSz="914400" rtl="0" eaLnBrk="0" fontAlgn="base" latinLnBrk="0" hangingPunct="0">
+              <a:spcBef>
+                <a:spcPct val="0"/>
+              </a:spcBef>
+              <a:spcAft>
+                <a:spcPts val="600"/>
+              </a:spcAft>
+              <a:buClrTx/>
+              <a:buSzTx/>
+              <a:buFontTx/>
+              <a:buNone/>
+              <a:tabLst/>
+            </a:pPr>
+            <a:r>
+              <a:rPr kumimoji="0" lang="en-US" altLang="en-US" sz="1700" b="0" i="0" u="none" strike="noStrike" cap="none" normalizeH="0" baseline="0">
+                <a:ln>
+                  <a:noFill/>
+                </a:ln>
+                <a:effectLst/>
+                <a:latin typeface="Arial" panose="020B0604020202020204" pitchFamily="34" charset="0"/>
+              </a:rPr>
+              <a:t>✅ </a:t>
+            </a:r>
+            <a:r>
+              <a:rPr kumimoji="0" lang="en-US" altLang="en-US" sz="1700" b="0" i="1" u="none" strike="noStrike" cap="none" normalizeH="0" baseline="0">
+                <a:ln>
+                  <a:noFill/>
+                </a:ln>
+                <a:effectLst/>
+                <a:latin typeface="Arial" panose="020B0604020202020204" pitchFamily="34" charset="0"/>
+              </a:rPr>
+              <a:t>Used for performance review, resource allocation, and process improvement.</a:t>
+            </a:r>
+            <a:endParaRPr kumimoji="0" lang="en-US" altLang="en-US" sz="1700" b="0" i="0" u="none" strike="noStrike" cap="none" normalizeH="0" baseline="0">
+              <a:ln>
+                <a:noFill/>
+              </a:ln>
+              <a:effectLst/>
+              <a:latin typeface="Arial" panose="020B0604020202020204" pitchFamily="34" charset="0"/>
+            </a:endParaRPr>
+          </a:p>
+        </p:txBody>
+      </p:sp>
+    </p:spTree>
+    <p:extLst>
+      <p:ext uri="{BB962C8B-B14F-4D97-AF65-F5344CB8AC3E}">
+        <p14:creationId xmlns:p14="http://schemas.microsoft.com/office/powerpoint/2010/main" val="875664582"/>
+      </p:ext>
+    </p:extLst>
+  </p:cSld>
+  <p:clrMapOvr>
+    <a:masterClrMapping/>
+  </p:clrMapOvr>
+</p:sld>
+</file>
+
+<file path=ppt/slides/slide16.xml><?xml version="1.0" encoding="utf-8"?>
+<p:sld xmlns:a="http://schemas.openxmlformats.org/drawingml/2006/main" xmlns:r="http://schemas.openxmlformats.org/officeDocument/2006/relationships" xmlns:p="http://schemas.openxmlformats.org/presentationml/2006/main">
+  <p:cSld>
+    <p:bg>
+      <p:bgPr>
+        <a:solidFill>
+          <a:schemeClr val="bg1"/>
+        </a:solidFill>
+        <a:effectLst/>
+      </p:bgPr>
+    </p:bg>
+    <p:spTree>
+      <p:nvGrpSpPr>
+        <p:cNvPr id="1" name="">
+          <a:extLst>
+            <a:ext uri="{FF2B5EF4-FFF2-40B4-BE49-F238E27FC236}">
+              <a16:creationId xmlns:a16="http://schemas.microsoft.com/office/drawing/2014/main" id="{61973B34-52A5-2793-7116-D6A8BB617C43}"/>
+            </a:ext>
+          </a:extLst>
+        </p:cNvPr>
+        <p:cNvGrpSpPr/>
+        <p:nvPr/>
+      </p:nvGrpSpPr>
+      <p:grpSpPr>
+        <a:xfrm>
+          <a:off x="0" y="0"/>
+          <a:ext cx="0" cy="0"/>
+          <a:chOff x="0" y="0"/>
+          <a:chExt cx="0" cy="0"/>
+        </a:xfrm>
+      </p:grpSpPr>
+      <p:sp useBgFill="1">
+        <p:nvSpPr>
+          <p:cNvPr id="8" name="Rectangle 7">
+            <a:extLst>
+              <a:ext uri="{FF2B5EF4-FFF2-40B4-BE49-F238E27FC236}">
+                <a16:creationId xmlns:a16="http://schemas.microsoft.com/office/drawing/2014/main" id="{09588DA8-065E-4F6F-8EFD-43104AB2E0CF}"/>
+              </a:ext>
+              <a:ext uri="{C183D7F6-B498-43B3-948B-1728B52AA6E4}">
+                <adec:decorative xmlns:adec="http://schemas.microsoft.com/office/drawing/2017/decorative" val="1"/>
+              </a:ext>
+            </a:extLst>
+          </p:cNvPr>
+          <p:cNvSpPr>
+            <a:spLocks noGrp="1" noRot="1" noChangeAspect="1" noMove="1" noResize="1" noEditPoints="1" noAdjustHandles="1" noChangeArrowheads="1" noChangeShapeType="1" noTextEdit="1"/>
+          </p:cNvSpPr>
+          <p:nvPr>
+            <p:extLst>
+              <p:ext uri="{386F3935-93C4-4BCD-93E2-E3B085C9AB24}">
+                <p16:designElem xmlns:p16="http://schemas.microsoft.com/office/powerpoint/2015/main" val="1"/>
+              </p:ext>
+            </p:extLst>
+          </p:nvPr>
+        </p:nvSpPr>
+        <p:spPr>
+          <a:xfrm>
+            <a:off x="0" y="0"/>
+            <a:ext cx="9144000" cy="6858000"/>
+          </a:xfrm>
+          <a:prstGeom prst="rect">
+            <a:avLst/>
+          </a:prstGeom>
+          <a:ln w="12700" cap="flat" cmpd="sng" algn="ctr">
+            <a:noFill/>
+            <a:prstDash val="solid"/>
+            <a:miter lim="800000"/>
+          </a:ln>
+          <a:effectLst/>
+          <a:extLst>
+            <a:ext uri="{91240B29-F687-4F45-9708-019B960494DF}">
+              <a14:hiddenLine xmlns:a14="http://schemas.microsoft.com/office/drawing/2010/main" w="12700" cap="flat" cmpd="sng" algn="ctr">
+                <a:solidFill>
+                  <a:schemeClr val="accent1">
+                    <a:shade val="50000"/>
+                  </a:schemeClr>
+                </a:solidFill>
+                <a:prstDash val="solid"/>
+                <a:miter lim="800000"/>
+              </a14:hiddenLine>
+            </a:ext>
+          </a:extLst>
+        </p:spPr>
+        <p:style>
+          <a:lnRef idx="2">
+            <a:schemeClr val="accent1">
+              <a:shade val="50000"/>
+            </a:schemeClr>
+          </a:lnRef>
+          <a:fillRef idx="1">
+            <a:schemeClr val="accent1"/>
+          </a:fillRef>
+          <a:effectRef idx="0">
+            <a:schemeClr val="accent1"/>
+          </a:effectRef>
+          <a:fontRef idx="minor">
+            <a:schemeClr val="lt1"/>
+          </a:fontRef>
+        </p:style>
+        <p:txBody>
+          <a:bodyPr rtlCol="0" anchor="ctr"/>
+          <a:lstStyle/>
+          <a:p>
+            <a:pPr algn="ctr"/>
+            <a:endParaRPr lang="en-US"/>
+          </a:p>
+        </p:txBody>
+      </p:sp>
+      <p:sp useBgFill="1">
+        <p:nvSpPr>
+          <p:cNvPr id="10" name="Rectangle 9">
+            <a:extLst>
+              <a:ext uri="{FF2B5EF4-FFF2-40B4-BE49-F238E27FC236}">
+                <a16:creationId xmlns:a16="http://schemas.microsoft.com/office/drawing/2014/main" id="{C4285719-470E-454C-AF62-8323075F1F5B}"/>
+              </a:ext>
+              <a:ext uri="{C183D7F6-B498-43B3-948B-1728B52AA6E4}">
+                <adec:decorative xmlns:adec="http://schemas.microsoft.com/office/drawing/2017/decorative" val="1"/>
+              </a:ext>
+            </a:extLst>
+          </p:cNvPr>
+          <p:cNvSpPr>
+            <a:spLocks noGrp="1" noRot="1" noChangeAspect="1" noMove="1" noResize="1" noEditPoints="1" noAdjustHandles="1" noChangeArrowheads="1" noChangeShapeType="1" noTextEdit="1"/>
+          </p:cNvSpPr>
+          <p:nvPr>
+            <p:extLst>
+              <p:ext uri="{386F3935-93C4-4BCD-93E2-E3B085C9AB24}">
+                <p16:designElem xmlns:p16="http://schemas.microsoft.com/office/powerpoint/2015/main" val="1"/>
+              </p:ext>
+            </p:extLst>
+          </p:nvPr>
+        </p:nvSpPr>
+        <p:spPr>
+          <a:xfrm>
+            <a:off x="0" y="0"/>
+            <a:ext cx="9141714" cy="6858000"/>
+          </a:xfrm>
+          <a:prstGeom prst="rect">
+            <a:avLst/>
+          </a:prstGeom>
+          <a:ln w="12700" cap="flat" cmpd="sng" algn="ctr">
+            <a:noFill/>
+            <a:prstDash val="solid"/>
+            <a:miter lim="800000"/>
+          </a:ln>
+          <a:effectLst/>
+          <a:extLst>
+            <a:ext uri="{91240B29-F687-4F45-9708-019B960494DF}">
+              <a14:hiddenLine xmlns:a14="http://schemas.microsoft.com/office/drawing/2010/main" w="12700" cap="flat" cmpd="sng" algn="ctr">
+                <a:solidFill>
+                  <a:schemeClr val="accent1">
+                    <a:shade val="50000"/>
+                  </a:schemeClr>
+                </a:solidFill>
+                <a:prstDash val="solid"/>
+                <a:miter lim="800000"/>
+              </a14:hiddenLine>
+            </a:ext>
+          </a:extLst>
+        </p:spPr>
+        <p:style>
+          <a:lnRef idx="2">
+            <a:schemeClr val="accent1">
+              <a:shade val="50000"/>
+            </a:schemeClr>
+          </a:lnRef>
+          <a:fillRef idx="1">
+            <a:schemeClr val="accent1"/>
+          </a:fillRef>
+          <a:effectRef idx="0">
+            <a:schemeClr val="accent1"/>
+          </a:effectRef>
+          <a:fontRef idx="minor">
+            <a:schemeClr val="lt1"/>
+          </a:fontRef>
+        </p:style>
+        <p:txBody>
+          <a:bodyPr rtlCol="0" anchor="ctr"/>
+          <a:lstStyle/>
+          <a:p>
+            <a:pPr algn="ctr"/>
+            <a:endParaRPr lang="en-US"/>
+          </a:p>
+        </p:txBody>
+      </p:sp>
+      <p:sp>
+        <p:nvSpPr>
+          <p:cNvPr id="12" name="Rectangle 11">
+            <a:extLst>
+              <a:ext uri="{FF2B5EF4-FFF2-40B4-BE49-F238E27FC236}">
+                <a16:creationId xmlns:a16="http://schemas.microsoft.com/office/drawing/2014/main" id="{CD9FE4EF-C4D8-49A0-B2FF-81D8DB7D8A24}"/>
+              </a:ext>
+              <a:ext uri="{C183D7F6-B498-43B3-948B-1728B52AA6E4}">
+                <adec:decorative xmlns:adec="http://schemas.microsoft.com/office/drawing/2017/decorative" val="1"/>
+              </a:ext>
+            </a:extLst>
+          </p:cNvPr>
+          <p:cNvSpPr>
+            <a:spLocks noGrp="1" noRot="1" noChangeAspect="1" noMove="1" noResize="1" noEditPoints="1" noAdjustHandles="1" noChangeArrowheads="1" noChangeShapeType="1" noTextEdit="1"/>
+          </p:cNvSpPr>
+          <p:nvPr>
+            <p:extLst>
+              <p:ext uri="{386F3935-93C4-4BCD-93E2-E3B085C9AB24}">
+                <p16:designElem xmlns:p16="http://schemas.microsoft.com/office/powerpoint/2015/main" val="1"/>
+              </p:ext>
+            </p:extLst>
+          </p:nvPr>
+        </p:nvSpPr>
+        <p:spPr>
+          <a:xfrm rot="5400000" flipH="1">
+            <a:off x="-1914813" y="1914812"/>
+            <a:ext cx="6858000" cy="3028377"/>
+          </a:xfrm>
+          <a:prstGeom prst="rect">
+            <a:avLst/>
+          </a:prstGeom>
+          <a:gradFill>
+            <a:gsLst>
+              <a:gs pos="8000">
+                <a:srgbClr val="000000"/>
+              </a:gs>
+              <a:gs pos="100000">
+                <a:schemeClr val="accent1">
+                  <a:lumMod val="75000"/>
+                </a:schemeClr>
+              </a:gs>
+            </a:gsLst>
+            <a:lin ang="3000000" scaled="0"/>
+          </a:gradFill>
+          <a:ln>
+            <a:noFill/>
+          </a:ln>
+        </p:spPr>
+        <p:style>
+          <a:lnRef idx="2">
+            <a:schemeClr val="accent1">
+              <a:shade val="50000"/>
+            </a:schemeClr>
+          </a:lnRef>
+          <a:fillRef idx="1">
+            <a:schemeClr val="accent1"/>
+          </a:fillRef>
+          <a:effectRef idx="0">
+            <a:schemeClr val="accent1"/>
+          </a:effectRef>
+          <a:fontRef idx="minor">
+            <a:schemeClr val="lt1"/>
+          </a:fontRef>
+        </p:style>
+        <p:txBody>
+          <a:bodyPr rtlCol="0" anchor="ctr"/>
+          <a:lstStyle/>
+          <a:p>
+            <a:pPr algn="ctr"/>
+            <a:endParaRPr lang="en-US"/>
+          </a:p>
+        </p:txBody>
+      </p:sp>
+      <p:sp>
+        <p:nvSpPr>
+          <p:cNvPr id="14" name="Rectangle 13">
+            <a:extLst>
+              <a:ext uri="{FF2B5EF4-FFF2-40B4-BE49-F238E27FC236}">
+                <a16:creationId xmlns:a16="http://schemas.microsoft.com/office/drawing/2014/main" id="{4300840D-0A0B-4512-BACA-B439D5B9C57C}"/>
+              </a:ext>
+              <a:ext uri="{C183D7F6-B498-43B3-948B-1728B52AA6E4}">
+                <adec:decorative xmlns:adec="http://schemas.microsoft.com/office/drawing/2017/decorative" val="1"/>
+              </a:ext>
+            </a:extLst>
+          </p:cNvPr>
+          <p:cNvSpPr>
+            <a:spLocks noGrp="1" noRot="1" noChangeAspect="1" noMove="1" noResize="1" noEditPoints="1" noAdjustHandles="1" noChangeArrowheads="1" noChangeShapeType="1" noTextEdit="1"/>
+          </p:cNvSpPr>
+          <p:nvPr>
+            <p:extLst>
+              <p:ext uri="{386F3935-93C4-4BCD-93E2-E3B085C9AB24}">
+                <p16:designElem xmlns:p16="http://schemas.microsoft.com/office/powerpoint/2015/main" val="1"/>
+              </p:ext>
+            </p:extLst>
+          </p:nvPr>
+        </p:nvSpPr>
+        <p:spPr>
+          <a:xfrm rot="5400000" flipH="1">
+            <a:off x="-1914814" y="1924949"/>
+            <a:ext cx="6857999" cy="3028379"/>
+          </a:xfrm>
+          <a:prstGeom prst="rect">
+            <a:avLst/>
+          </a:prstGeom>
+          <a:gradFill>
+            <a:gsLst>
+              <a:gs pos="0">
+                <a:srgbClr val="000000">
+                  <a:alpha val="0"/>
+                </a:srgbClr>
+              </a:gs>
+              <a:gs pos="99000">
+                <a:schemeClr val="accent1">
+                  <a:alpha val="46000"/>
+                </a:schemeClr>
+              </a:gs>
+            </a:gsLst>
+            <a:lin ang="1800000" scaled="0"/>
+          </a:gradFill>
+          <a:ln>
+            <a:noFill/>
+          </a:ln>
+        </p:spPr>
+        <p:style>
+          <a:lnRef idx="2">
+            <a:schemeClr val="accent1">
+              <a:shade val="50000"/>
+            </a:schemeClr>
+          </a:lnRef>
+          <a:fillRef idx="1">
+            <a:schemeClr val="accent1"/>
+          </a:fillRef>
+          <a:effectRef idx="0">
+            <a:schemeClr val="accent1"/>
+          </a:effectRef>
+          <a:fontRef idx="minor">
+            <a:schemeClr val="lt1"/>
+          </a:fontRef>
+        </p:style>
+        <p:txBody>
+          <a:bodyPr rtlCol="0" anchor="ctr"/>
+          <a:lstStyle/>
+          <a:p>
+            <a:pPr algn="ctr"/>
+            <a:endParaRPr lang="en-US"/>
+          </a:p>
+        </p:txBody>
+      </p:sp>
+      <p:sp>
+        <p:nvSpPr>
+          <p:cNvPr id="16" name="Rectangle 15">
+            <a:extLst>
+              <a:ext uri="{FF2B5EF4-FFF2-40B4-BE49-F238E27FC236}">
+                <a16:creationId xmlns:a16="http://schemas.microsoft.com/office/drawing/2014/main" id="{D2B78728-A580-49A7-84F9-6EF6F583ADE0}"/>
+              </a:ext>
+              <a:ext uri="{C183D7F6-B498-43B3-948B-1728B52AA6E4}">
+                <adec:decorative xmlns:adec="http://schemas.microsoft.com/office/drawing/2017/decorative" val="1"/>
+              </a:ext>
+            </a:extLst>
+          </p:cNvPr>
+          <p:cNvSpPr>
+            <a:spLocks noGrp="1" noRot="1" noChangeAspect="1" noMove="1" noResize="1" noEditPoints="1" noAdjustHandles="1" noChangeArrowheads="1" noChangeShapeType="1" noTextEdit="1"/>
+          </p:cNvSpPr>
+          <p:nvPr>
+            <p:extLst>
+              <p:ext uri="{386F3935-93C4-4BCD-93E2-E3B085C9AB24}">
+                <p16:designElem xmlns:p16="http://schemas.microsoft.com/office/powerpoint/2015/main" val="1"/>
+              </p:ext>
+            </p:extLst>
+          </p:nvPr>
+        </p:nvSpPr>
+        <p:spPr>
+          <a:xfrm rot="5400000" flipH="1">
+            <a:off x="263195" y="4092815"/>
+            <a:ext cx="2501979" cy="3028381"/>
+          </a:xfrm>
+          <a:prstGeom prst="rect">
+            <a:avLst/>
+          </a:prstGeom>
+          <a:gradFill>
+            <a:gsLst>
+              <a:gs pos="2000">
+                <a:schemeClr val="accent1">
+                  <a:alpha val="29000"/>
+                </a:schemeClr>
+              </a:gs>
+              <a:gs pos="100000">
+                <a:srgbClr val="000000">
+                  <a:alpha val="30000"/>
+                </a:srgbClr>
+              </a:gs>
+            </a:gsLst>
+            <a:lin ang="7800000" scaled="0"/>
+          </a:gradFill>
+          <a:ln>
+            <a:noFill/>
+          </a:ln>
+        </p:spPr>
+        <p:style>
+          <a:lnRef idx="2">
+            <a:schemeClr val="accent1">
+              <a:shade val="50000"/>
+            </a:schemeClr>
+          </a:lnRef>
+          <a:fillRef idx="1">
+            <a:schemeClr val="accent1"/>
+          </a:fillRef>
+          <a:effectRef idx="0">
+            <a:schemeClr val="accent1"/>
+          </a:effectRef>
+          <a:fontRef idx="minor">
+            <a:schemeClr val="lt1"/>
+          </a:fontRef>
+        </p:style>
+        <p:txBody>
+          <a:bodyPr rtlCol="0" anchor="ctr"/>
+          <a:lstStyle/>
+          <a:p>
+            <a:pPr algn="ctr"/>
+            <a:endParaRPr lang="en-US" dirty="0"/>
+          </a:p>
+        </p:txBody>
+      </p:sp>
+      <p:sp>
+        <p:nvSpPr>
+          <p:cNvPr id="18" name="Freeform: Shape 17">
+            <a:extLst>
+              <a:ext uri="{FF2B5EF4-FFF2-40B4-BE49-F238E27FC236}">
+                <a16:creationId xmlns:a16="http://schemas.microsoft.com/office/drawing/2014/main" id="{38FAA1A1-D861-433F-88FA-1E9D6FD31D11}"/>
+              </a:ext>
+              <a:ext uri="{C183D7F6-B498-43B3-948B-1728B52AA6E4}">
+                <adec:decorative xmlns:adec="http://schemas.microsoft.com/office/drawing/2017/decorative" val="1"/>
+              </a:ext>
+            </a:extLst>
+          </p:cNvPr>
+          <p:cNvSpPr>
+            <a:spLocks noGrp="1" noRot="1" noChangeAspect="1" noMove="1" noResize="1" noEditPoints="1" noAdjustHandles="1" noChangeArrowheads="1" noChangeShapeType="1" noTextEdit="1"/>
+          </p:cNvSpPr>
+          <p:nvPr>
+            <p:extLst>
+              <p:ext uri="{386F3935-93C4-4BCD-93E2-E3B085C9AB24}">
+                <p16:designElem xmlns:p16="http://schemas.microsoft.com/office/powerpoint/2015/main" val="1"/>
+              </p:ext>
+            </p:extLst>
+          </p:nvPr>
+        </p:nvSpPr>
+        <p:spPr>
+          <a:xfrm rot="20635413">
+            <a:off x="-376302" y="969718"/>
+            <a:ext cx="2925267" cy="4178958"/>
+          </a:xfrm>
+          <a:custGeom>
+            <a:avLst/>
+            <a:gdLst>
+              <a:gd name="connsiteX0" fmla="*/ 2432225 w 3900357"/>
+              <a:gd name="connsiteY0" fmla="*/ 93939 h 4178958"/>
+              <a:gd name="connsiteX1" fmla="*/ 3900357 w 3900357"/>
+              <a:gd name="connsiteY1" fmla="*/ 2089479 h 4178958"/>
+              <a:gd name="connsiteX2" fmla="*/ 1810878 w 3900357"/>
+              <a:gd name="connsiteY2" fmla="*/ 4178958 h 4178958"/>
+              <a:gd name="connsiteX3" fmla="*/ 78249 w 3900357"/>
+              <a:gd name="connsiteY3" fmla="*/ 3257727 h 4178958"/>
+              <a:gd name="connsiteX4" fmla="*/ 0 w 3900357"/>
+              <a:gd name="connsiteY4" fmla="*/ 3128923 h 4178958"/>
+              <a:gd name="connsiteX5" fmla="*/ 831324 w 3900357"/>
+              <a:gd name="connsiteY5" fmla="*/ 244281 h 4178958"/>
+              <a:gd name="connsiteX6" fmla="*/ 997559 w 3900357"/>
+              <a:gd name="connsiteY6" fmla="*/ 164202 h 4178958"/>
+              <a:gd name="connsiteX7" fmla="*/ 1810878 w 3900357"/>
+              <a:gd name="connsiteY7" fmla="*/ 0 h 4178958"/>
+              <a:gd name="connsiteX8" fmla="*/ 2432225 w 3900357"/>
+              <a:gd name="connsiteY8" fmla="*/ 93939 h 4178958"/>
+            </a:gdLst>
+            <a:ahLst/>
+            <a:cxnLst>
+              <a:cxn ang="0">
+                <a:pos x="connsiteX0" y="connsiteY0"/>
+              </a:cxn>
+              <a:cxn ang="0">
+                <a:pos x="connsiteX1" y="connsiteY1"/>
+              </a:cxn>
+              <a:cxn ang="0">
+                <a:pos x="connsiteX2" y="connsiteY2"/>
+              </a:cxn>
+              <a:cxn ang="0">
+                <a:pos x="connsiteX3" y="connsiteY3"/>
+              </a:cxn>
+              <a:cxn ang="0">
+                <a:pos x="connsiteX4" y="connsiteY4"/>
+              </a:cxn>
+              <a:cxn ang="0">
+                <a:pos x="connsiteX5" y="connsiteY5"/>
+              </a:cxn>
+              <a:cxn ang="0">
+                <a:pos x="connsiteX6" y="connsiteY6"/>
+              </a:cxn>
+              <a:cxn ang="0">
+                <a:pos x="connsiteX7" y="connsiteY7"/>
+              </a:cxn>
+              <a:cxn ang="0">
+                <a:pos x="connsiteX8" y="connsiteY8"/>
+              </a:cxn>
+            </a:cxnLst>
+            <a:rect l="l" t="t" r="r" b="b"/>
+            <a:pathLst>
+              <a:path w="3900357" h="4178958">
+                <a:moveTo>
+                  <a:pt x="2432225" y="93939"/>
+                </a:moveTo>
+                <a:cubicBezTo>
+                  <a:pt x="3282786" y="358491"/>
+                  <a:pt x="3900357" y="1151865"/>
+                  <a:pt x="3900357" y="2089479"/>
+                </a:cubicBezTo>
+                <a:cubicBezTo>
+                  <a:pt x="3900357" y="3243466"/>
+                  <a:pt x="2964865" y="4178958"/>
+                  <a:pt x="1810878" y="4178958"/>
+                </a:cubicBezTo>
+                <a:cubicBezTo>
+                  <a:pt x="1089636" y="4178958"/>
+                  <a:pt x="453744" y="3813531"/>
+                  <a:pt x="78249" y="3257727"/>
+                </a:cubicBezTo>
+                <a:lnTo>
+                  <a:pt x="0" y="3128923"/>
+                </a:lnTo>
+                <a:lnTo>
+                  <a:pt x="831324" y="244281"/>
+                </a:lnTo>
+                <a:lnTo>
+                  <a:pt x="997559" y="164202"/>
+                </a:lnTo>
+                <a:cubicBezTo>
+                  <a:pt x="1247540" y="58468"/>
+                  <a:pt x="1522381" y="0"/>
+                  <a:pt x="1810878" y="0"/>
+                </a:cubicBezTo>
+                <a:cubicBezTo>
+                  <a:pt x="2027251" y="0"/>
+                  <a:pt x="2235942" y="32888"/>
+                  <a:pt x="2432225" y="93939"/>
+                </a:cubicBezTo>
+                <a:close/>
+              </a:path>
+            </a:pathLst>
+          </a:custGeom>
+          <a:gradFill>
+            <a:gsLst>
+              <a:gs pos="29000">
+                <a:srgbClr val="000000">
+                  <a:alpha val="0"/>
+                </a:srgbClr>
+              </a:gs>
+              <a:gs pos="100000">
+                <a:schemeClr val="accent1">
+                  <a:alpha val="43000"/>
+                </a:schemeClr>
+              </a:gs>
+            </a:gsLst>
+            <a:lin ang="1800000" scaled="0"/>
+          </a:gradFill>
+          <a:ln>
+            <a:noFill/>
+          </a:ln>
+        </p:spPr>
+        <p:style>
+          <a:lnRef idx="2">
+            <a:schemeClr val="accent1">
+              <a:shade val="50000"/>
+            </a:schemeClr>
+          </a:lnRef>
+          <a:fillRef idx="1">
+            <a:schemeClr val="accent1"/>
+          </a:fillRef>
+          <a:effectRef idx="0">
+            <a:schemeClr val="accent1"/>
+          </a:effectRef>
+          <a:fontRef idx="minor">
+            <a:schemeClr val="lt1"/>
+          </a:fontRef>
+        </p:style>
+        <p:txBody>
+          <a:bodyPr wrap="square" rtlCol="0" anchor="ctr">
+            <a:noAutofit/>
+          </a:bodyPr>
+          <a:lstStyle/>
+          <a:p>
+            <a:pPr algn="ctr"/>
+            <a:endParaRPr lang="en-US" dirty="0"/>
+          </a:p>
+        </p:txBody>
+      </p:sp>
+      <p:sp>
+        <p:nvSpPr>
+          <p:cNvPr id="20" name="Rectangle 19">
+            <a:extLst>
+              <a:ext uri="{FF2B5EF4-FFF2-40B4-BE49-F238E27FC236}">
+                <a16:creationId xmlns:a16="http://schemas.microsoft.com/office/drawing/2014/main" id="{8D71EDA1-87BF-4D5D-AB79-F346FD19278A}"/>
+              </a:ext>
+              <a:ext uri="{C183D7F6-B498-43B3-948B-1728B52AA6E4}">
+                <adec:decorative xmlns:adec="http://schemas.microsoft.com/office/drawing/2017/decorative" val="1"/>
+              </a:ext>
+            </a:extLst>
+          </p:cNvPr>
+          <p:cNvSpPr>
+            <a:spLocks noGrp="1" noRot="1" noChangeAspect="1" noMove="1" noResize="1" noEditPoints="1" noAdjustHandles="1" noChangeArrowheads="1" noChangeShapeType="1" noTextEdit="1"/>
+          </p:cNvSpPr>
+          <p:nvPr>
+            <p:extLst>
+              <p:ext uri="{386F3935-93C4-4BCD-93E2-E3B085C9AB24}">
+                <p16:designElem xmlns:p16="http://schemas.microsoft.com/office/powerpoint/2015/main" val="1"/>
+              </p:ext>
+            </p:extLst>
+          </p:nvPr>
+        </p:nvSpPr>
+        <p:spPr>
+          <a:xfrm rot="5400000" flipH="1">
+            <a:off x="-1914820" y="1904672"/>
+            <a:ext cx="6858003" cy="3028376"/>
+          </a:xfrm>
+          <a:prstGeom prst="rect">
+            <a:avLst/>
+          </a:prstGeom>
+          <a:gradFill>
+            <a:gsLst>
+              <a:gs pos="0">
+                <a:srgbClr val="000000">
+                  <a:alpha val="0"/>
+                </a:srgbClr>
+              </a:gs>
+              <a:gs pos="99000">
+                <a:schemeClr val="accent1">
+                  <a:lumMod val="60000"/>
+                  <a:lumOff val="40000"/>
+                  <a:alpha val="11000"/>
+                </a:schemeClr>
+              </a:gs>
+            </a:gsLst>
+            <a:lin ang="7200000" scaled="0"/>
+          </a:gradFill>
+          <a:ln>
+            <a:noFill/>
+          </a:ln>
+        </p:spPr>
+        <p:style>
+          <a:lnRef idx="2">
+            <a:schemeClr val="accent1">
+              <a:shade val="50000"/>
+            </a:schemeClr>
+          </a:lnRef>
+          <a:fillRef idx="1">
+            <a:schemeClr val="accent1"/>
+          </a:fillRef>
+          <a:effectRef idx="0">
+            <a:schemeClr val="accent1"/>
+          </a:effectRef>
+          <a:fontRef idx="minor">
+            <a:schemeClr val="lt1"/>
+          </a:fontRef>
+        </p:style>
+        <p:txBody>
+          <a:bodyPr rtlCol="0" anchor="ctr"/>
+          <a:lstStyle/>
+          <a:p>
+            <a:pPr algn="ctr"/>
+            <a:endParaRPr lang="en-US"/>
+          </a:p>
+        </p:txBody>
+      </p:sp>
+      <p:sp>
+        <p:nvSpPr>
+          <p:cNvPr id="2" name="Title 1">
+            <a:extLst>
+              <a:ext uri="{FF2B5EF4-FFF2-40B4-BE49-F238E27FC236}">
+                <a16:creationId xmlns:a16="http://schemas.microsoft.com/office/drawing/2014/main" id="{10F53823-12D9-BC94-9ED9-5D385DF9EFFD}"/>
+              </a:ext>
+            </a:extLst>
+          </p:cNvPr>
+          <p:cNvSpPr>
+            <a:spLocks noGrp="1"/>
+          </p:cNvSpPr>
+          <p:nvPr>
+            <p:ph type="title"/>
+          </p:nvPr>
+        </p:nvSpPr>
+        <p:spPr>
+          <a:xfrm>
+            <a:off x="350041" y="586855"/>
+            <a:ext cx="2401025" cy="3387497"/>
+          </a:xfrm>
+        </p:spPr>
+        <p:txBody>
+          <a:bodyPr anchor="b">
+            <a:normAutofit/>
+          </a:bodyPr>
+          <a:lstStyle/>
+          <a:p>
+            <a:pPr algn="r"/>
+            <a:r>
+              <a:rPr lang="en-US" sz="2200">
+                <a:solidFill>
+                  <a:srgbClr val="FFFFFF"/>
+                </a:solidFill>
+              </a:rPr>
+              <a:t>BI View Recommendation</a:t>
+            </a:r>
+            <a:endParaRPr lang="en-MY" sz="2200">
+              <a:solidFill>
+                <a:srgbClr val="FFFFFF"/>
+              </a:solidFill>
+            </a:endParaRPr>
+          </a:p>
+        </p:txBody>
+      </p:sp>
+      <p:sp>
+        <p:nvSpPr>
+          <p:cNvPr id="3" name="Rectangle 1">
+            <a:extLst>
+              <a:ext uri="{FF2B5EF4-FFF2-40B4-BE49-F238E27FC236}">
+                <a16:creationId xmlns:a16="http://schemas.microsoft.com/office/drawing/2014/main" id="{61A55417-8110-06B8-82E5-04FE9D7E1DC3}"/>
+              </a:ext>
+            </a:extLst>
+          </p:cNvPr>
+          <p:cNvSpPr>
+            <a:spLocks noGrp="1" noChangeArrowheads="1"/>
+          </p:cNvSpPr>
+          <p:nvPr>
+            <p:ph idx="1"/>
+          </p:nvPr>
+        </p:nvSpPr>
+        <p:spPr bwMode="auto">
+          <a:xfrm>
+            <a:off x="3607694" y="649480"/>
+            <a:ext cx="4916510" cy="5546047"/>
+          </a:xfrm>
+          <a:prstGeom prst="rect">
+            <a:avLst/>
+          </a:prstGeom>
+          <a:extLst>
+            <a:ext uri="{909E8E84-426E-40DD-AFC4-6F175D3DCCD1}">
+              <a14:hiddenFill xmlns:a14="http://schemas.microsoft.com/office/drawing/2010/main">
+                <a:solidFill>
+                  <a:schemeClr val="accent1"/>
+                </a:solidFill>
+              </a14:hiddenFill>
+            </a:ext>
+            <a:ext uri="{91240B29-F687-4F45-9708-019B960494DF}">
+              <a14:hiddenLine xmlns:a14="http://schemas.microsoft.com/office/drawing/2010/main" w="9525">
+                <a:solidFill>
+                  <a:schemeClr val="tx1"/>
+                </a:solidFill>
+                <a:miter lim="800000"/>
+                <a:headEnd/>
+                <a:tailEnd/>
+              </a14:hiddenLine>
+            </a:ext>
+            <a:ext uri="{AF507438-7753-43E0-B8FC-AC1667EBCBE1}">
+              <a14:hiddenEffects xmlns:a14="http://schemas.microsoft.com/office/drawing/2010/main">
+                <a:effectLst>
+                  <a:outerShdw dist="35921" dir="2700000" algn="ctr" rotWithShape="0">
+                    <a:schemeClr val="bg2"/>
+                  </a:outerShdw>
+                </a:effectLst>
+              </a14:hiddenEffects>
+            </a:ext>
+          </a:extLst>
+        </p:spPr>
+        <p:txBody>
+          <a:bodyPr vert="horz" lIns="91440" tIns="45720" rIns="91440" bIns="45720" numCol="1" anchor="ctr" anchorCtr="0" compatLnSpc="1">
+            <a:prstTxWarp prst="textNoShape">
+              <a:avLst/>
+            </a:prstTxWarp>
+            <a:normAutofit/>
+          </a:bodyPr>
+          <a:lstStyle/>
+          <a:p>
+            <a:pPr marL="0" marR="0" lvl="0" indent="0" defTabSz="914400" rtl="0" eaLnBrk="0" fontAlgn="base" latinLnBrk="0" hangingPunct="0">
+              <a:spcBef>
+                <a:spcPct val="0"/>
+              </a:spcBef>
+              <a:spcAft>
+                <a:spcPts val="600"/>
+              </a:spcAft>
+              <a:buClrTx/>
+              <a:buSzTx/>
+              <a:buFontTx/>
+              <a:buNone/>
+              <a:tabLst/>
+            </a:pPr>
+            <a:r>
+              <a:rPr kumimoji="0" lang="en-US" altLang="en-US" sz="1700" b="1" i="0" u="none" strike="noStrike" cap="none" normalizeH="0" baseline="0">
+                <a:ln>
+                  <a:noFill/>
+                </a:ln>
+                <a:effectLst/>
+                <a:latin typeface="Arial" panose="020B0604020202020204" pitchFamily="34" charset="0"/>
+              </a:rPr>
+              <a:t>📊 3. Strategic Dashboard</a:t>
+            </a:r>
+          </a:p>
+          <a:p>
+            <a:pPr marL="0" marR="0" lvl="0" indent="0" defTabSz="914400" rtl="0" eaLnBrk="0" fontAlgn="base" latinLnBrk="0" hangingPunct="0">
+              <a:spcBef>
+                <a:spcPct val="0"/>
+              </a:spcBef>
+              <a:spcAft>
+                <a:spcPts val="600"/>
+              </a:spcAft>
+              <a:buClrTx/>
+              <a:buSzTx/>
+              <a:buFontTx/>
+              <a:buNone/>
+              <a:tabLst/>
+            </a:pPr>
+            <a:r>
+              <a:rPr lang="en-US" altLang="en-US" sz="1700" b="1">
+                <a:latin typeface="Arial" panose="020B0604020202020204" pitchFamily="34" charset="0"/>
+              </a:rPr>
+              <a:t>Audience</a:t>
+            </a:r>
+            <a:r>
+              <a:rPr kumimoji="0" lang="en-US" altLang="en-US" sz="1700" b="0" i="0" u="none" strike="noStrike" cap="none" normalizeH="0" baseline="0">
+                <a:ln>
+                  <a:noFill/>
+                </a:ln>
+                <a:effectLst/>
+                <a:latin typeface="Arial" panose="020B0604020202020204" pitchFamily="34" charset="0"/>
+              </a:rPr>
+              <a:t>: Executives, senior leadership</a:t>
+            </a:r>
+          </a:p>
+          <a:p>
+            <a:pPr marL="0" marR="0" lvl="0" indent="0" defTabSz="914400" rtl="0" eaLnBrk="0" fontAlgn="base" latinLnBrk="0" hangingPunct="0">
+              <a:spcBef>
+                <a:spcPct val="0"/>
+              </a:spcBef>
+              <a:spcAft>
+                <a:spcPts val="600"/>
+              </a:spcAft>
+              <a:buClrTx/>
+              <a:buSzTx/>
+              <a:buFontTx/>
+              <a:buNone/>
+              <a:tabLst/>
+            </a:pPr>
+            <a:r>
+              <a:rPr kumimoji="0" lang="en-US" altLang="en-US" sz="1700" b="1" i="0" u="none" strike="noStrike" cap="none" normalizeH="0" baseline="0">
+                <a:ln>
+                  <a:noFill/>
+                </a:ln>
+                <a:effectLst/>
+                <a:latin typeface="Arial" panose="020B0604020202020204" pitchFamily="34" charset="0"/>
+              </a:rPr>
+              <a:t>Focus</a:t>
+            </a:r>
+            <a:r>
+              <a:rPr kumimoji="0" lang="en-US" altLang="en-US" sz="1700" b="0" i="0" u="none" strike="noStrike" cap="none" normalizeH="0" baseline="0">
+                <a:ln>
+                  <a:noFill/>
+                </a:ln>
+                <a:effectLst/>
+                <a:latin typeface="Arial" panose="020B0604020202020204" pitchFamily="34" charset="0"/>
+              </a:rPr>
+              <a:t>: Long-term goals, strategic alignment</a:t>
+            </a:r>
+          </a:p>
+          <a:p>
+            <a:pPr marL="0" marR="0" lvl="0" indent="0" defTabSz="914400" rtl="0" eaLnBrk="0" fontAlgn="base" latinLnBrk="0" hangingPunct="0">
+              <a:spcBef>
+                <a:spcPct val="0"/>
+              </a:spcBef>
+              <a:spcAft>
+                <a:spcPts val="600"/>
+              </a:spcAft>
+              <a:buClrTx/>
+              <a:buSzTx/>
+              <a:buFontTx/>
+              <a:buNone/>
+              <a:tabLst/>
+            </a:pPr>
+            <a:r>
+              <a:rPr kumimoji="0" lang="en-US" altLang="en-US" sz="1700" b="1" i="0" u="none" strike="noStrike" cap="none" normalizeH="0" baseline="0">
+                <a:ln>
+                  <a:noFill/>
+                </a:ln>
+                <a:effectLst/>
+                <a:latin typeface="Arial" panose="020B0604020202020204" pitchFamily="34" charset="0"/>
+              </a:rPr>
+              <a:t>Insights</a:t>
+            </a:r>
+            <a:r>
+              <a:rPr kumimoji="0" lang="en-US" altLang="en-US" sz="1700" b="0" i="0" u="none" strike="noStrike" cap="none" normalizeH="0" baseline="0">
+                <a:ln>
+                  <a:noFill/>
+                </a:ln>
+                <a:effectLst/>
+                <a:latin typeface="Arial" panose="020B0604020202020204" pitchFamily="34" charset="0"/>
+              </a:rPr>
+              <a:t>:</a:t>
+            </a:r>
+          </a:p>
+          <a:p>
+            <a:pPr marL="400050" lvl="1" indent="0" defTabSz="914400" eaLnBrk="0" fontAlgn="base" hangingPunct="0">
+              <a:spcBef>
+                <a:spcPct val="0"/>
+              </a:spcBef>
+              <a:spcAft>
+                <a:spcPts val="600"/>
+              </a:spcAft>
+              <a:buFontTx/>
+              <a:buChar char="•"/>
+            </a:pPr>
+            <a:r>
+              <a:rPr kumimoji="0" lang="en-US" altLang="en-US" sz="1700" b="1" i="0" u="none" strike="noStrike" cap="none" normalizeH="0" baseline="0">
+                <a:ln>
+                  <a:noFill/>
+                </a:ln>
+                <a:effectLst/>
+                <a:latin typeface="Arial" panose="020B0604020202020204" pitchFamily="34" charset="0"/>
+              </a:rPr>
+              <a:t>Data governance compliance</a:t>
+            </a:r>
+            <a:r>
+              <a:rPr kumimoji="0" lang="en-US" altLang="en-US" sz="1700" b="0" i="0" u="none" strike="noStrike" cap="none" normalizeH="0" baseline="0">
+                <a:ln>
+                  <a:noFill/>
+                </a:ln>
+                <a:effectLst/>
+                <a:latin typeface="Arial" panose="020B0604020202020204" pitchFamily="34" charset="0"/>
+              </a:rPr>
+              <a:t> (e.g., personal data protection adherence)</a:t>
+            </a:r>
+          </a:p>
+          <a:p>
+            <a:pPr marL="400050" lvl="1" indent="0" defTabSz="914400" eaLnBrk="0" fontAlgn="base" hangingPunct="0">
+              <a:spcBef>
+                <a:spcPct val="0"/>
+              </a:spcBef>
+              <a:spcAft>
+                <a:spcPts val="600"/>
+              </a:spcAft>
+              <a:buFontTx/>
+              <a:buChar char="•"/>
+            </a:pPr>
+            <a:r>
+              <a:rPr kumimoji="0" lang="en-US" altLang="en-US" sz="1700" b="1" i="0" u="none" strike="noStrike" cap="none" normalizeH="0" baseline="0">
+                <a:ln>
+                  <a:noFill/>
+                </a:ln>
+                <a:effectLst/>
+                <a:latin typeface="Arial" panose="020B0604020202020204" pitchFamily="34" charset="0"/>
+              </a:rPr>
+              <a:t>Business impact of data initiatives</a:t>
+            </a:r>
+            <a:r>
+              <a:rPr kumimoji="0" lang="en-US" altLang="en-US" sz="1700" b="0" i="0" u="none" strike="noStrike" cap="none" normalizeH="0" baseline="0">
+                <a:ln>
+                  <a:noFill/>
+                </a:ln>
+                <a:effectLst/>
+                <a:latin typeface="Arial" panose="020B0604020202020204" pitchFamily="34" charset="0"/>
+              </a:rPr>
+              <a:t> (e.g., revenue influenced by analytics)</a:t>
+            </a:r>
+          </a:p>
+          <a:p>
+            <a:pPr marL="400050" lvl="1" indent="0" defTabSz="914400" eaLnBrk="0" fontAlgn="base" hangingPunct="0">
+              <a:spcBef>
+                <a:spcPct val="0"/>
+              </a:spcBef>
+              <a:spcAft>
+                <a:spcPts val="600"/>
+              </a:spcAft>
+              <a:buFontTx/>
+              <a:buChar char="•"/>
+            </a:pPr>
+            <a:r>
+              <a:rPr kumimoji="0" lang="en-US" altLang="en-US" sz="1700" b="1" i="0" u="none" strike="noStrike" cap="none" normalizeH="0" baseline="0">
+                <a:ln>
+                  <a:noFill/>
+                </a:ln>
+                <a:effectLst/>
+                <a:latin typeface="Arial" panose="020B0604020202020204" pitchFamily="34" charset="0"/>
+              </a:rPr>
+              <a:t>Adoption of digital tools</a:t>
+            </a:r>
+            <a:r>
+              <a:rPr kumimoji="0" lang="en-US" altLang="en-US" sz="1700" b="0" i="0" u="none" strike="noStrike" cap="none" normalizeH="0" baseline="0">
+                <a:ln>
+                  <a:noFill/>
+                </a:ln>
+                <a:effectLst/>
+                <a:latin typeface="Arial" panose="020B0604020202020204" pitchFamily="34" charset="0"/>
+              </a:rPr>
+              <a:t> (e.g., Power BI usage across business units)</a:t>
+            </a:r>
+          </a:p>
+          <a:p>
+            <a:pPr marL="400050" lvl="1" indent="0" defTabSz="914400" eaLnBrk="0" fontAlgn="base" hangingPunct="0">
+              <a:spcBef>
+                <a:spcPct val="0"/>
+              </a:spcBef>
+              <a:spcAft>
+                <a:spcPts val="600"/>
+              </a:spcAft>
+              <a:buFontTx/>
+              <a:buChar char="•"/>
+            </a:pPr>
+            <a:r>
+              <a:rPr kumimoji="0" lang="en-US" altLang="en-US" sz="1700" b="1" i="0" u="none" strike="noStrike" cap="none" normalizeH="0" baseline="0">
+                <a:ln>
+                  <a:noFill/>
+                </a:ln>
+                <a:effectLst/>
+                <a:latin typeface="Arial" panose="020B0604020202020204" pitchFamily="34" charset="0"/>
+              </a:rPr>
+              <a:t>Strategic KPIs</a:t>
+            </a:r>
+            <a:r>
+              <a:rPr kumimoji="0" lang="en-US" altLang="en-US" sz="1700" b="0" i="0" u="none" strike="noStrike" cap="none" normalizeH="0" baseline="0">
+                <a:ln>
+                  <a:noFill/>
+                </a:ln>
+                <a:effectLst/>
+                <a:latin typeface="Arial" panose="020B0604020202020204" pitchFamily="34" charset="0"/>
+              </a:rPr>
+              <a:t> (e.g., customer satisfaction, operational efficiency)</a:t>
+            </a:r>
+          </a:p>
+          <a:p>
+            <a:pPr marL="400050" lvl="1" indent="0" defTabSz="914400" eaLnBrk="0" fontAlgn="base" hangingPunct="0">
+              <a:spcBef>
+                <a:spcPct val="0"/>
+              </a:spcBef>
+              <a:spcAft>
+                <a:spcPts val="600"/>
+              </a:spcAft>
+              <a:buFontTx/>
+              <a:buChar char="•"/>
+            </a:pPr>
+            <a:r>
+              <a:rPr kumimoji="0" lang="en-US" altLang="en-US" sz="1700" b="1" i="0" u="none" strike="noStrike" cap="none" normalizeH="0" baseline="0">
+                <a:ln>
+                  <a:noFill/>
+                </a:ln>
+                <a:effectLst/>
+                <a:latin typeface="Arial" panose="020B0604020202020204" pitchFamily="34" charset="0"/>
+              </a:rPr>
+              <a:t>Forecasting and risk indicators</a:t>
+            </a:r>
+            <a:r>
+              <a:rPr kumimoji="0" lang="en-US" altLang="en-US" sz="1700" b="0" i="0" u="none" strike="noStrike" cap="none" normalizeH="0" baseline="0">
+                <a:ln>
+                  <a:noFill/>
+                </a:ln>
+                <a:effectLst/>
+                <a:latin typeface="Arial" panose="020B0604020202020204" pitchFamily="34" charset="0"/>
+              </a:rPr>
+              <a:t> (e.g., data breach likelihood, scalability trends)</a:t>
+            </a:r>
+          </a:p>
+          <a:p>
+            <a:pPr marL="0" marR="0" lvl="0" indent="0" defTabSz="914400" rtl="0" eaLnBrk="0" fontAlgn="base" latinLnBrk="0" hangingPunct="0">
+              <a:spcBef>
+                <a:spcPct val="0"/>
+              </a:spcBef>
+              <a:spcAft>
+                <a:spcPts val="600"/>
+              </a:spcAft>
+              <a:buClrTx/>
+              <a:buSzTx/>
+              <a:buFontTx/>
+              <a:buNone/>
+              <a:tabLst/>
+            </a:pPr>
+            <a:r>
+              <a:rPr kumimoji="0" lang="en-US" altLang="en-US" sz="1700" b="0" i="0" u="none" strike="noStrike" cap="none" normalizeH="0" baseline="0">
+                <a:ln>
+                  <a:noFill/>
+                </a:ln>
+                <a:effectLst/>
+                <a:latin typeface="Arial" panose="020B0604020202020204" pitchFamily="34" charset="0"/>
+              </a:rPr>
+              <a:t>✅ </a:t>
+            </a:r>
+            <a:r>
+              <a:rPr kumimoji="0" lang="en-US" altLang="en-US" sz="1700" b="0" i="1" u="none" strike="noStrike" cap="none" normalizeH="0" baseline="0">
+                <a:ln>
+                  <a:noFill/>
+                </a:ln>
+                <a:effectLst/>
+                <a:latin typeface="Arial" panose="020B0604020202020204" pitchFamily="34" charset="0"/>
+              </a:rPr>
+              <a:t>Used for strategic planning, investment decisions, and policy setting.</a:t>
+            </a:r>
+            <a:endParaRPr kumimoji="0" lang="en-US" altLang="en-US" sz="1700" b="0" i="0" u="none" strike="noStrike" cap="none" normalizeH="0" baseline="0">
+              <a:ln>
+                <a:noFill/>
+              </a:ln>
+              <a:effectLst/>
+              <a:latin typeface="Arial" panose="020B0604020202020204" pitchFamily="34" charset="0"/>
+            </a:endParaRPr>
+          </a:p>
+        </p:txBody>
+      </p:sp>
+    </p:spTree>
+    <p:extLst>
+      <p:ext uri="{BB962C8B-B14F-4D97-AF65-F5344CB8AC3E}">
+        <p14:creationId xmlns:p14="http://schemas.microsoft.com/office/powerpoint/2010/main" val="377977464"/>
+      </p:ext>
+    </p:extLst>
+  </p:cSld>
+  <p:clrMapOvr>
+    <a:masterClrMapping/>
+  </p:clrMapOvr>
+</p:sld>
+</file>
+
 <file path=ppt/slides/slide2.xml><?xml version="1.0" encoding="utf-8"?>
 <p:sld xmlns:a="http://schemas.openxmlformats.org/drawingml/2006/main" xmlns:r="http://schemas.openxmlformats.org/officeDocument/2006/relationships" xmlns:p="http://schemas.openxmlformats.org/presentationml/2006/main">
   <p:cSld>
